--- a/ppts/CHAPTER 1 LLM Fundamentals with LangChain.pptx
+++ b/ppts/CHAPTER 1 LLM Fundamentals with LangChain.pptx
@@ -5,10 +5,10 @@
     <p:sldMasterId id="2147483660" r:id="rId1"/>
   </p:sldMasterIdLst>
   <p:notesMasterIdLst>
-    <p:notesMasterId r:id="rId24"/>
+    <p:notesMasterId r:id="rId22"/>
   </p:notesMasterIdLst>
   <p:handoutMasterIdLst>
-    <p:handoutMasterId r:id="rId25"/>
+    <p:handoutMasterId r:id="rId23"/>
   </p:handoutMasterIdLst>
   <p:sldIdLst>
     <p:sldId id="256" r:id="rId2"/>
@@ -31,8 +31,6 @@
     <p:sldId id="1186" r:id="rId19"/>
     <p:sldId id="1190" r:id="rId20"/>
     <p:sldId id="1187" r:id="rId21"/>
-    <p:sldId id="1188" r:id="rId22"/>
-    <p:sldId id="1189" r:id="rId23"/>
   </p:sldIdLst>
   <p:sldSz cx="12192000" cy="6858000"/>
   <p:notesSz cx="6858000" cy="9144000"/>
@@ -160,8 +158,6 @@
             <p14:sldId id="1186"/>
             <p14:sldId id="1190"/>
             <p14:sldId id="1187"/>
-            <p14:sldId id="1188"/>
-            <p14:sldId id="1189"/>
           </p14:sldIdLst>
         </p14:section>
         <p14:section name="자세한 정보" id="{2CC34DB2-6590-42C0-AD4B-A04C6060184E}">
@@ -286,7 +282,7 @@
                 <a:latin typeface="맑은 고딕" panose="020B0503020000020004" pitchFamily="50" charset="-127"/>
                 <a:ea typeface="맑은 고딕" panose="020B0503020000020004" pitchFamily="50" charset="-127"/>
               </a:rPr>
-              <a:t>2026-10-15</a:t>
+              <a:t>2026-10-16</a:t>
             </a:fld>
             <a:endParaRPr lang="ko-KR" altLang="en-US">
               <a:latin typeface="맑은 고딕" panose="020B0503020000020004" pitchFamily="50" charset="-127"/>
@@ -472,7 +468,7 @@
           <a:p>
             <a:fld id="{43E1C3DD-4A19-441D-907C-380838DB51C4}" type="datetime1">
               <a:rPr lang="ko-KR" altLang="en-US" noProof="0" smtClean="0"/>
-              <a:t>2026-10-15</a:t>
+              <a:t>2026-10-16</a:t>
             </a:fld>
             <a:endParaRPr lang="ko-KR" altLang="en-US" noProof="0"/>
           </a:p>
@@ -1224,254 +1220,6 @@
 </p:notes>
 </file>
 
-<file path=ppt/notesSlides/notesSlide5.xml><?xml version="1.0" encoding="utf-8"?>
-<p:notes xmlns:a="http://schemas.openxmlformats.org/drawingml/2006/main" xmlns:r="http://schemas.openxmlformats.org/officeDocument/2006/relationships" xmlns:p="http://schemas.openxmlformats.org/presentationml/2006/main">
-  <p:cSld>
-    <p:spTree>
-      <p:nvGrpSpPr>
-        <p:cNvPr id="1" name="">
-          <a:extLst>
-            <a:ext uri="{FF2B5EF4-FFF2-40B4-BE49-F238E27FC236}">
-              <a16:creationId xmlns:a16="http://schemas.microsoft.com/office/drawing/2014/main" id="{FE284487-DBD0-9C5C-3C0F-38C023D7C4A2}"/>
-            </a:ext>
-          </a:extLst>
-        </p:cNvPr>
-        <p:cNvGrpSpPr/>
-        <p:nvPr/>
-      </p:nvGrpSpPr>
-      <p:grpSpPr>
-        <a:xfrm>
-          <a:off x="0" y="0"/>
-          <a:ext cx="0" cy="0"/>
-          <a:chOff x="0" y="0"/>
-          <a:chExt cx="0" cy="0"/>
-        </a:xfrm>
-      </p:grpSpPr>
-      <p:sp>
-        <p:nvSpPr>
-          <p:cNvPr id="2" name="슬라이드 이미지 개체 틀 1">
-            <a:extLst>
-              <a:ext uri="{FF2B5EF4-FFF2-40B4-BE49-F238E27FC236}">
-                <a16:creationId xmlns:a16="http://schemas.microsoft.com/office/drawing/2014/main" id="{D8CCDB84-2593-2717-186B-F13A3D271264}"/>
-              </a:ext>
-            </a:extLst>
-          </p:cNvPr>
-          <p:cNvSpPr>
-            <a:spLocks noGrp="1" noRot="1" noChangeAspect="1"/>
-          </p:cNvSpPr>
-          <p:nvPr>
-            <p:ph type="sldImg"/>
-          </p:nvPr>
-        </p:nvSpPr>
-        <p:spPr>
-          <a:xfrm>
-            <a:off x="685800" y="1143000"/>
-            <a:ext cx="5486400" cy="3086100"/>
-          </a:xfrm>
-        </p:spPr>
-      </p:sp>
-      <p:sp>
-        <p:nvSpPr>
-          <p:cNvPr id="3" name="슬라이드 노트 개체 틀 2">
-            <a:extLst>
-              <a:ext uri="{FF2B5EF4-FFF2-40B4-BE49-F238E27FC236}">
-                <a16:creationId xmlns:a16="http://schemas.microsoft.com/office/drawing/2014/main" id="{E8C5ECA1-28F6-9A6D-50BC-7BF3C68211A4}"/>
-              </a:ext>
-            </a:extLst>
-          </p:cNvPr>
-          <p:cNvSpPr>
-            <a:spLocks noGrp="1"/>
-          </p:cNvSpPr>
-          <p:nvPr>
-            <p:ph type="body" idx="1"/>
-          </p:nvPr>
-        </p:nvSpPr>
-        <p:spPr/>
-        <p:txBody>
-          <a:bodyPr rtlCol="0"/>
-          <a:lstStyle/>
-          <a:p>
-            <a:pPr rtl="0"/>
-            <a:endParaRPr lang="ko-KR" altLang="en-US">
-              <a:latin typeface="맑은 고딕" panose="020B0503020000020004" pitchFamily="50" charset="-127"/>
-              <a:ea typeface="맑은 고딕" panose="020B0503020000020004" pitchFamily="50" charset="-127"/>
-            </a:endParaRPr>
-          </a:p>
-        </p:txBody>
-      </p:sp>
-      <p:sp>
-        <p:nvSpPr>
-          <p:cNvPr id="4" name="슬라이드 번호 개체 틀 3">
-            <a:extLst>
-              <a:ext uri="{FF2B5EF4-FFF2-40B4-BE49-F238E27FC236}">
-                <a16:creationId xmlns:a16="http://schemas.microsoft.com/office/drawing/2014/main" id="{AB34BA6D-3ED2-472D-12D0-2CA5CCC8C1C6}"/>
-              </a:ext>
-            </a:extLst>
-          </p:cNvPr>
-          <p:cNvSpPr>
-            <a:spLocks noGrp="1"/>
-          </p:cNvSpPr>
-          <p:nvPr>
-            <p:ph type="sldNum" sz="quarter" idx="10"/>
-          </p:nvPr>
-        </p:nvSpPr>
-        <p:spPr/>
-        <p:txBody>
-          <a:bodyPr rtlCol="0"/>
-          <a:lstStyle/>
-          <a:p>
-            <a:pPr rtl="0"/>
-            <a:fld id="{DF61EA0F-A667-4B49-8422-0062BC55E249}" type="slidenum">
-              <a:rPr lang="en-US" altLang="ko-KR" smtClean="0">
-                <a:latin typeface="맑은 고딕" panose="020B0503020000020004" pitchFamily="50" charset="-127"/>
-                <a:ea typeface="맑은 고딕" panose="020B0503020000020004" pitchFamily="50" charset="-127"/>
-              </a:rPr>
-              <a:t>21</a:t>
-            </a:fld>
-            <a:endParaRPr lang="ko-KR" altLang="en-US">
-              <a:latin typeface="맑은 고딕" panose="020B0503020000020004" pitchFamily="50" charset="-127"/>
-              <a:ea typeface="맑은 고딕" panose="020B0503020000020004" pitchFamily="50" charset="-127"/>
-            </a:endParaRPr>
-          </a:p>
-        </p:txBody>
-      </p:sp>
-    </p:spTree>
-    <p:extLst>
-      <p:ext uri="{BB962C8B-B14F-4D97-AF65-F5344CB8AC3E}">
-        <p14:creationId xmlns:p14="http://schemas.microsoft.com/office/powerpoint/2010/main" val="2761793650"/>
-      </p:ext>
-    </p:extLst>
-  </p:cSld>
-  <p:clrMapOvr>
-    <a:masterClrMapping/>
-  </p:clrMapOvr>
-</p:notes>
-</file>
-
-<file path=ppt/notesSlides/notesSlide6.xml><?xml version="1.0" encoding="utf-8"?>
-<p:notes xmlns:a="http://schemas.openxmlformats.org/drawingml/2006/main" xmlns:r="http://schemas.openxmlformats.org/officeDocument/2006/relationships" xmlns:p="http://schemas.openxmlformats.org/presentationml/2006/main">
-  <p:cSld>
-    <p:spTree>
-      <p:nvGrpSpPr>
-        <p:cNvPr id="1" name="">
-          <a:extLst>
-            <a:ext uri="{FF2B5EF4-FFF2-40B4-BE49-F238E27FC236}">
-              <a16:creationId xmlns:a16="http://schemas.microsoft.com/office/drawing/2014/main" id="{3F0768CE-886B-D4E2-0AF5-E70127601328}"/>
-            </a:ext>
-          </a:extLst>
-        </p:cNvPr>
-        <p:cNvGrpSpPr/>
-        <p:nvPr/>
-      </p:nvGrpSpPr>
-      <p:grpSpPr>
-        <a:xfrm>
-          <a:off x="0" y="0"/>
-          <a:ext cx="0" cy="0"/>
-          <a:chOff x="0" y="0"/>
-          <a:chExt cx="0" cy="0"/>
-        </a:xfrm>
-      </p:grpSpPr>
-      <p:sp>
-        <p:nvSpPr>
-          <p:cNvPr id="2" name="슬라이드 이미지 개체 틀 1">
-            <a:extLst>
-              <a:ext uri="{FF2B5EF4-FFF2-40B4-BE49-F238E27FC236}">
-                <a16:creationId xmlns:a16="http://schemas.microsoft.com/office/drawing/2014/main" id="{8E42D8DE-D214-D6D3-A763-47799AD2C033}"/>
-              </a:ext>
-            </a:extLst>
-          </p:cNvPr>
-          <p:cNvSpPr>
-            <a:spLocks noGrp="1" noRot="1" noChangeAspect="1"/>
-          </p:cNvSpPr>
-          <p:nvPr>
-            <p:ph type="sldImg"/>
-          </p:nvPr>
-        </p:nvSpPr>
-        <p:spPr>
-          <a:xfrm>
-            <a:off x="685800" y="1143000"/>
-            <a:ext cx="5486400" cy="3086100"/>
-          </a:xfrm>
-        </p:spPr>
-      </p:sp>
-      <p:sp>
-        <p:nvSpPr>
-          <p:cNvPr id="3" name="슬라이드 노트 개체 틀 2">
-            <a:extLst>
-              <a:ext uri="{FF2B5EF4-FFF2-40B4-BE49-F238E27FC236}">
-                <a16:creationId xmlns:a16="http://schemas.microsoft.com/office/drawing/2014/main" id="{6AC8FE79-3982-3262-57FD-AB38DA4BC13A}"/>
-              </a:ext>
-            </a:extLst>
-          </p:cNvPr>
-          <p:cNvSpPr>
-            <a:spLocks noGrp="1"/>
-          </p:cNvSpPr>
-          <p:nvPr>
-            <p:ph type="body" idx="1"/>
-          </p:nvPr>
-        </p:nvSpPr>
-        <p:spPr/>
-        <p:txBody>
-          <a:bodyPr rtlCol="0"/>
-          <a:lstStyle/>
-          <a:p>
-            <a:pPr rtl="0"/>
-            <a:endParaRPr lang="ko-KR" altLang="en-US">
-              <a:latin typeface="맑은 고딕" panose="020B0503020000020004" pitchFamily="50" charset="-127"/>
-              <a:ea typeface="맑은 고딕" panose="020B0503020000020004" pitchFamily="50" charset="-127"/>
-            </a:endParaRPr>
-          </a:p>
-        </p:txBody>
-      </p:sp>
-      <p:sp>
-        <p:nvSpPr>
-          <p:cNvPr id="4" name="슬라이드 번호 개체 틀 3">
-            <a:extLst>
-              <a:ext uri="{FF2B5EF4-FFF2-40B4-BE49-F238E27FC236}">
-                <a16:creationId xmlns:a16="http://schemas.microsoft.com/office/drawing/2014/main" id="{424B68D8-3EB9-F51B-F145-D8E9F5052B79}"/>
-              </a:ext>
-            </a:extLst>
-          </p:cNvPr>
-          <p:cNvSpPr>
-            <a:spLocks noGrp="1"/>
-          </p:cNvSpPr>
-          <p:nvPr>
-            <p:ph type="sldNum" sz="quarter" idx="10"/>
-          </p:nvPr>
-        </p:nvSpPr>
-        <p:spPr/>
-        <p:txBody>
-          <a:bodyPr rtlCol="0"/>
-          <a:lstStyle/>
-          <a:p>
-            <a:pPr rtl="0"/>
-            <a:fld id="{DF61EA0F-A667-4B49-8422-0062BC55E249}" type="slidenum">
-              <a:rPr lang="en-US" altLang="ko-KR" smtClean="0">
-                <a:latin typeface="맑은 고딕" panose="020B0503020000020004" pitchFamily="50" charset="-127"/>
-                <a:ea typeface="맑은 고딕" panose="020B0503020000020004" pitchFamily="50" charset="-127"/>
-              </a:rPr>
-              <a:t>22</a:t>
-            </a:fld>
-            <a:endParaRPr lang="ko-KR" altLang="en-US">
-              <a:latin typeface="맑은 고딕" panose="020B0503020000020004" pitchFamily="50" charset="-127"/>
-              <a:ea typeface="맑은 고딕" panose="020B0503020000020004" pitchFamily="50" charset="-127"/>
-            </a:endParaRPr>
-          </a:p>
-        </p:txBody>
-      </p:sp>
-    </p:spTree>
-    <p:extLst>
-      <p:ext uri="{BB962C8B-B14F-4D97-AF65-F5344CB8AC3E}">
-        <p14:creationId xmlns:p14="http://schemas.microsoft.com/office/powerpoint/2010/main" val="557860476"/>
-      </p:ext>
-    </p:extLst>
-  </p:cSld>
-  <p:clrMapOvr>
-    <a:masterClrMapping/>
-  </p:clrMapOvr>
-</p:notes>
-</file>
-
 <file path=ppt/slideLayouts/slideLayout1.xml><?xml version="1.0" encoding="utf-8"?>
 <p:sldLayout xmlns:a="http://schemas.openxmlformats.org/drawingml/2006/main" xmlns:r="http://schemas.openxmlformats.org/officeDocument/2006/relationships" xmlns:p="http://schemas.openxmlformats.org/presentationml/2006/main" preserve="1" userDrawn="1">
   <p:cSld name="제목 슬라이드">
@@ -1940,7 +1688,7 @@
           <a:p>
             <a:fld id="{990475B5-67CA-4281-BDCA-DA943C3C8EB3}" type="datetime1">
               <a:rPr lang="ko-KR" altLang="en-US" noProof="0" smtClean="0"/>
-              <a:t>2026-10-15</a:t>
+              <a:t>2026-10-16</a:t>
             </a:fld>
             <a:endParaRPr lang="ko-KR" altLang="en-US" noProof="0"/>
           </a:p>
@@ -2594,7 +2342,7 @@
           <a:p>
             <a:fld id="{48A87A34-81AB-432B-8DAE-1953F412C126}" type="datetimeFigureOut">
               <a:rPr lang="en-US" smtClean="0"/>
-              <a:t>10/15/2026</a:t>
+              <a:t>10/16/2026</a:t>
             </a:fld>
             <a:endParaRPr lang="en-US" dirty="0"/>
           </a:p>
@@ -2890,7 +2638,7 @@
           <a:p>
             <a:fld id="{C655C81E-72E7-4D05-94B5-F45B321A525D}" type="datetime1">
               <a:rPr lang="ko-KR" altLang="en-US" noProof="0" smtClean="0"/>
-              <a:t>2026-10-15</a:t>
+              <a:t>2026-10-16</a:t>
             </a:fld>
             <a:endParaRPr lang="ko-KR" altLang="en-US" noProof="0" dirty="0">
               <a:latin typeface="맑은 고딕" panose="020B0503020000020004" pitchFamily="50" charset="-127"/>
@@ -7269,174 +7017,6 @@
     <p:extLst>
       <p:ext uri="{BB962C8B-B14F-4D97-AF65-F5344CB8AC3E}">
         <p14:creationId xmlns:p14="http://schemas.microsoft.com/office/powerpoint/2010/main" val="4181255719"/>
-      </p:ext>
-    </p:extLst>
-  </p:cSld>
-  <p:clrMapOvr>
-    <a:masterClrMapping/>
-  </p:clrMapOvr>
-</p:sld>
-</file>
-
-<file path=ppt/slides/slide21.xml><?xml version="1.0" encoding="utf-8"?>
-<p:sld xmlns:a="http://schemas.openxmlformats.org/drawingml/2006/main" xmlns:r="http://schemas.openxmlformats.org/officeDocument/2006/relationships" xmlns:p="http://schemas.openxmlformats.org/presentationml/2006/main">
-  <p:cSld>
-    <p:spTree>
-      <p:nvGrpSpPr>
-        <p:cNvPr id="1" name="">
-          <a:extLst>
-            <a:ext uri="{FF2B5EF4-FFF2-40B4-BE49-F238E27FC236}">
-              <a16:creationId xmlns:a16="http://schemas.microsoft.com/office/drawing/2014/main" id="{AE6D15CC-4902-9022-0614-9D3ECB03D749}"/>
-            </a:ext>
-          </a:extLst>
-        </p:cNvPr>
-        <p:cNvGrpSpPr/>
-        <p:nvPr/>
-      </p:nvGrpSpPr>
-      <p:grpSpPr>
-        <a:xfrm>
-          <a:off x="0" y="0"/>
-          <a:ext cx="0" cy="0"/>
-          <a:chOff x="0" y="0"/>
-          <a:chExt cx="0" cy="0"/>
-        </a:xfrm>
-      </p:grpSpPr>
-      <p:sp>
-        <p:nvSpPr>
-          <p:cNvPr id="2" name="제목 1">
-            <a:extLst>
-              <a:ext uri="{FF2B5EF4-FFF2-40B4-BE49-F238E27FC236}">
-                <a16:creationId xmlns:a16="http://schemas.microsoft.com/office/drawing/2014/main" id="{0B80ED68-815F-6A96-7125-1FDFD5CA933C}"/>
-              </a:ext>
-            </a:extLst>
-          </p:cNvPr>
-          <p:cNvSpPr>
-            <a:spLocks noGrp="1"/>
-          </p:cNvSpPr>
-          <p:nvPr>
-            <p:ph type="ctrTitle"/>
-          </p:nvPr>
-        </p:nvSpPr>
-        <p:spPr>
-          <a:xfrm>
-            <a:off x="838199" y="1164324"/>
-            <a:ext cx="10934701" cy="2387600"/>
-          </a:xfrm>
-        </p:spPr>
-        <p:txBody>
-          <a:bodyPr rtlCol="0" anchor="ctr" anchorCtr="0">
-            <a:normAutofit/>
-          </a:bodyPr>
-          <a:lstStyle/>
-          <a:p>
-            <a:r>
-              <a:rPr lang="en-US" altLang="ko-KR" sz="4400" dirty="0" err="1">
-                <a:solidFill>
-                  <a:schemeClr val="bg1"/>
-                </a:solidFill>
-                <a:latin typeface="D2Coding" panose="020B0609020101020101" pitchFamily="49" charset="-127"/>
-                <a:ea typeface="D2Coding" panose="020B0609020101020101" pitchFamily="49" charset="-127"/>
-              </a:rPr>
-              <a:t>Streamlit</a:t>
-            </a:r>
-            <a:endParaRPr lang="ko-KR" altLang="en-US" sz="4400" dirty="0">
-              <a:solidFill>
-                <a:schemeClr val="bg1"/>
-              </a:solidFill>
-              <a:latin typeface="D2Coding" panose="020B0609020101020101" pitchFamily="49" charset="-127"/>
-              <a:ea typeface="D2Coding" panose="020B0609020101020101" pitchFamily="49" charset="-127"/>
-            </a:endParaRPr>
-          </a:p>
-        </p:txBody>
-      </p:sp>
-    </p:spTree>
-    <p:extLst>
-      <p:ext uri="{BB962C8B-B14F-4D97-AF65-F5344CB8AC3E}">
-        <p14:creationId xmlns:p14="http://schemas.microsoft.com/office/powerpoint/2010/main" val="1188627723"/>
-      </p:ext>
-    </p:extLst>
-  </p:cSld>
-  <p:clrMapOvr>
-    <a:masterClrMapping/>
-  </p:clrMapOvr>
-</p:sld>
-</file>
-
-<file path=ppt/slides/slide22.xml><?xml version="1.0" encoding="utf-8"?>
-<p:sld xmlns:a="http://schemas.openxmlformats.org/drawingml/2006/main" xmlns:r="http://schemas.openxmlformats.org/officeDocument/2006/relationships" xmlns:p="http://schemas.openxmlformats.org/presentationml/2006/main">
-  <p:cSld>
-    <p:spTree>
-      <p:nvGrpSpPr>
-        <p:cNvPr id="1" name="">
-          <a:extLst>
-            <a:ext uri="{FF2B5EF4-FFF2-40B4-BE49-F238E27FC236}">
-              <a16:creationId xmlns:a16="http://schemas.microsoft.com/office/drawing/2014/main" id="{C110C06D-91AB-81CF-C256-100507EF693E}"/>
-            </a:ext>
-          </a:extLst>
-        </p:cNvPr>
-        <p:cNvGrpSpPr/>
-        <p:nvPr/>
-      </p:nvGrpSpPr>
-      <p:grpSpPr>
-        <a:xfrm>
-          <a:off x="0" y="0"/>
-          <a:ext cx="0" cy="0"/>
-          <a:chOff x="0" y="0"/>
-          <a:chExt cx="0" cy="0"/>
-        </a:xfrm>
-      </p:grpSpPr>
-      <p:sp>
-        <p:nvSpPr>
-          <p:cNvPr id="2" name="제목 1">
-            <a:extLst>
-              <a:ext uri="{FF2B5EF4-FFF2-40B4-BE49-F238E27FC236}">
-                <a16:creationId xmlns:a16="http://schemas.microsoft.com/office/drawing/2014/main" id="{B068A0DE-3A3E-3FBF-A5FA-B56B5F0F0982}"/>
-              </a:ext>
-            </a:extLst>
-          </p:cNvPr>
-          <p:cNvSpPr>
-            <a:spLocks noGrp="1"/>
-          </p:cNvSpPr>
-          <p:nvPr>
-            <p:ph type="ctrTitle"/>
-          </p:nvPr>
-        </p:nvSpPr>
-        <p:spPr>
-          <a:xfrm>
-            <a:off x="838199" y="1164324"/>
-            <a:ext cx="10934701" cy="2387600"/>
-          </a:xfrm>
-        </p:spPr>
-        <p:txBody>
-          <a:bodyPr rtlCol="0" anchor="ctr" anchorCtr="0">
-            <a:normAutofit/>
-          </a:bodyPr>
-          <a:lstStyle/>
-          <a:p>
-            <a:r>
-              <a:rPr lang="en-US" altLang="ko-KR" sz="4400" dirty="0" err="1">
-                <a:solidFill>
-                  <a:schemeClr val="bg1"/>
-                </a:solidFill>
-                <a:latin typeface="D2Coding" panose="020B0609020101020101" pitchFamily="49" charset="-127"/>
-                <a:ea typeface="D2Coding" panose="020B0609020101020101" pitchFamily="49" charset="-127"/>
-              </a:rPr>
-              <a:t>Streamlit</a:t>
-            </a:r>
-            <a:endParaRPr lang="ko-KR" altLang="en-US" sz="4400" dirty="0">
-              <a:solidFill>
-                <a:schemeClr val="bg1"/>
-              </a:solidFill>
-              <a:latin typeface="D2Coding" panose="020B0609020101020101" pitchFamily="49" charset="-127"/>
-              <a:ea typeface="D2Coding" panose="020B0609020101020101" pitchFamily="49" charset="-127"/>
-            </a:endParaRPr>
-          </a:p>
-        </p:txBody>
-      </p:sp>
-    </p:spTree>
-    <p:extLst>
-      <p:ext uri="{BB962C8B-B14F-4D97-AF65-F5344CB8AC3E}">
-        <p14:creationId xmlns:p14="http://schemas.microsoft.com/office/powerpoint/2010/main" val="2775292893"/>
       </p:ext>
     </p:extLst>
   </p:cSld>

--- a/ppts/CHAPTER 1 LLM Fundamentals with LangChain.pptx
+++ b/ppts/CHAPTER 1 LLM Fundamentals with LangChain.pptx
@@ -5,10 +5,10 @@
     <p:sldMasterId id="2147483660" r:id="rId1"/>
   </p:sldMasterIdLst>
   <p:notesMasterIdLst>
-    <p:notesMasterId r:id="rId22"/>
+    <p:notesMasterId r:id="rId23"/>
   </p:notesMasterIdLst>
   <p:handoutMasterIdLst>
-    <p:handoutMasterId r:id="rId23"/>
+    <p:handoutMasterId r:id="rId24"/>
   </p:handoutMasterIdLst>
   <p:sldIdLst>
     <p:sldId id="256" r:id="rId2"/>
@@ -27,10 +27,11 @@
     <p:sldId id="1182" r:id="rId15"/>
     <p:sldId id="1183" r:id="rId16"/>
     <p:sldId id="1184" r:id="rId17"/>
-    <p:sldId id="1185" r:id="rId18"/>
-    <p:sldId id="1186" r:id="rId19"/>
-    <p:sldId id="1190" r:id="rId20"/>
-    <p:sldId id="1187" r:id="rId21"/>
+    <p:sldId id="1191" r:id="rId18"/>
+    <p:sldId id="1185" r:id="rId19"/>
+    <p:sldId id="1186" r:id="rId20"/>
+    <p:sldId id="1190" r:id="rId21"/>
+    <p:sldId id="1187" r:id="rId22"/>
   </p:sldIdLst>
   <p:sldSz cx="12192000" cy="6858000"/>
   <p:notesSz cx="6858000" cy="9144000"/>
@@ -154,6 +155,7 @@
             <p14:sldId id="1182"/>
             <p14:sldId id="1183"/>
             <p14:sldId id="1184"/>
+            <p14:sldId id="1191"/>
             <p14:sldId id="1185"/>
             <p14:sldId id="1186"/>
             <p14:sldId id="1190"/>
@@ -282,7 +284,7 @@
                 <a:latin typeface="맑은 고딕" panose="020B0503020000020004" pitchFamily="50" charset="-127"/>
                 <a:ea typeface="맑은 고딕" panose="020B0503020000020004" pitchFamily="50" charset="-127"/>
               </a:rPr>
-              <a:t>2026-10-16</a:t>
+              <a:t>2026-10-26</a:t>
             </a:fld>
             <a:endParaRPr lang="ko-KR" altLang="en-US">
               <a:latin typeface="맑은 고딕" panose="020B0503020000020004" pitchFamily="50" charset="-127"/>
@@ -468,7 +470,7 @@
           <a:p>
             <a:fld id="{43E1C3DD-4A19-441D-907C-380838DB51C4}" type="datetime1">
               <a:rPr lang="ko-KR" altLang="en-US" noProof="0" smtClean="0"/>
-              <a:t>2026-10-16</a:t>
+              <a:t>2026-10-26</a:t>
             </a:fld>
             <a:endParaRPr lang="ko-KR" altLang="en-US" noProof="0"/>
           </a:p>
@@ -1198,7 +1200,7 @@
                 <a:latin typeface="맑은 고딕" panose="020B0503020000020004" pitchFamily="50" charset="-127"/>
                 <a:ea typeface="맑은 고딕" panose="020B0503020000020004" pitchFamily="50" charset="-127"/>
               </a:rPr>
-              <a:t>18</a:t>
+              <a:t>19</a:t>
             </a:fld>
             <a:endParaRPr lang="ko-KR" altLang="en-US">
               <a:latin typeface="맑은 고딕" panose="020B0503020000020004" pitchFamily="50" charset="-127"/>
@@ -1688,7 +1690,7 @@
           <a:p>
             <a:fld id="{990475B5-67CA-4281-BDCA-DA943C3C8EB3}" type="datetime1">
               <a:rPr lang="ko-KR" altLang="en-US" noProof="0" smtClean="0"/>
-              <a:t>2026-10-16</a:t>
+              <a:t>2026-10-26</a:t>
             </a:fld>
             <a:endParaRPr lang="ko-KR" altLang="en-US" noProof="0"/>
           </a:p>
@@ -2342,7 +2344,7 @@
           <a:p>
             <a:fld id="{48A87A34-81AB-432B-8DAE-1953F412C126}" type="datetimeFigureOut">
               <a:rPr lang="en-US" smtClean="0"/>
-              <a:t>10/16/2026</a:t>
+              <a:t>10/26/2026</a:t>
             </a:fld>
             <a:endParaRPr lang="en-US" dirty="0"/>
           </a:p>
@@ -2638,7 +2640,7 @@
           <a:p>
             <a:fld id="{C655C81E-72E7-4D05-94B5-F45B321A525D}" type="datetime1">
               <a:rPr lang="ko-KR" altLang="en-US" noProof="0" smtClean="0"/>
-              <a:t>2026-10-16</a:t>
+              <a:t>2026-10-26</a:t>
             </a:fld>
             <a:endParaRPr lang="ko-KR" altLang="en-US" noProof="0" dirty="0">
               <a:latin typeface="맑은 고딕" panose="020B0503020000020004" pitchFamily="50" charset="-127"/>
@@ -5778,7 +5780,7 @@
         <p:cNvPr id="1" name="">
           <a:extLst>
             <a:ext uri="{FF2B5EF4-FFF2-40B4-BE49-F238E27FC236}">
-              <a16:creationId xmlns:a16="http://schemas.microsoft.com/office/drawing/2014/main" id="{9D9488B0-400C-E229-E258-5E8A74504421}"/>
+              <a16:creationId xmlns:a16="http://schemas.microsoft.com/office/drawing/2014/main" id="{E9C2E426-D36E-98C3-6CB1-A17AA9CA40A9}"/>
             </a:ext>
           </a:extLst>
         </p:cNvPr>
@@ -5795,10 +5797,450 @@
       </p:grpSpPr>
       <p:sp>
         <p:nvSpPr>
+          <p:cNvPr id="9" name="직사각형 8">
+            <a:extLst>
+              <a:ext uri="{FF2B5EF4-FFF2-40B4-BE49-F238E27FC236}">
+                <a16:creationId xmlns:a16="http://schemas.microsoft.com/office/drawing/2014/main" id="{45B1A4E9-4C95-29AE-922A-9331805224A0}"/>
+              </a:ext>
+            </a:extLst>
+          </p:cNvPr>
+          <p:cNvSpPr/>
+          <p:nvPr/>
+        </p:nvSpPr>
+        <p:spPr>
+          <a:xfrm>
+            <a:off x="769430" y="2592970"/>
+            <a:ext cx="4098134" cy="312523"/>
+          </a:xfrm>
+          <a:prstGeom prst="rect">
+            <a:avLst/>
+          </a:prstGeom>
+          <a:solidFill>
+            <a:schemeClr val="accent1">
+              <a:lumMod val="40000"/>
+              <a:lumOff val="60000"/>
+            </a:schemeClr>
+          </a:solidFill>
+          <a:ln>
+            <a:noFill/>
+          </a:ln>
+        </p:spPr>
+        <p:style>
+          <a:lnRef idx="2">
+            <a:schemeClr val="accent1">
+              <a:shade val="15000"/>
+            </a:schemeClr>
+          </a:lnRef>
+          <a:fillRef idx="1">
+            <a:schemeClr val="accent1"/>
+          </a:fillRef>
+          <a:effectRef idx="0">
+            <a:schemeClr val="accent1"/>
+          </a:effectRef>
+          <a:fontRef idx="minor">
+            <a:schemeClr val="lt1"/>
+          </a:fontRef>
+        </p:style>
+        <p:txBody>
+          <a:bodyPr rtlCol="0" anchor="ctr"/>
+          <a:lstStyle/>
+          <a:p>
+            <a:pPr algn="ctr"/>
+            <a:endParaRPr lang="ko-KR" altLang="en-US" dirty="0"/>
+          </a:p>
+        </p:txBody>
+      </p:sp>
+      <p:sp>
+        <p:nvSpPr>
+          <p:cNvPr id="12" name="직사각형 11">
+            <a:extLst>
+              <a:ext uri="{FF2B5EF4-FFF2-40B4-BE49-F238E27FC236}">
+                <a16:creationId xmlns:a16="http://schemas.microsoft.com/office/drawing/2014/main" id="{30F2604B-E561-CC76-4B2A-34D0F7C75C99}"/>
+              </a:ext>
+            </a:extLst>
+          </p:cNvPr>
+          <p:cNvSpPr/>
+          <p:nvPr/>
+        </p:nvSpPr>
+        <p:spPr>
+          <a:xfrm>
+            <a:off x="769430" y="3317383"/>
+            <a:ext cx="4098134" cy="312523"/>
+          </a:xfrm>
+          <a:prstGeom prst="rect">
+            <a:avLst/>
+          </a:prstGeom>
+          <a:solidFill>
+            <a:schemeClr val="accent1">
+              <a:lumMod val="40000"/>
+              <a:lumOff val="60000"/>
+            </a:schemeClr>
+          </a:solidFill>
+          <a:ln>
+            <a:noFill/>
+          </a:ln>
+        </p:spPr>
+        <p:style>
+          <a:lnRef idx="2">
+            <a:schemeClr val="accent1">
+              <a:shade val="15000"/>
+            </a:schemeClr>
+          </a:lnRef>
+          <a:fillRef idx="1">
+            <a:schemeClr val="accent1"/>
+          </a:fillRef>
+          <a:effectRef idx="0">
+            <a:schemeClr val="accent1"/>
+          </a:effectRef>
+          <a:fontRef idx="minor">
+            <a:schemeClr val="lt1"/>
+          </a:fontRef>
+        </p:style>
+        <p:txBody>
+          <a:bodyPr rtlCol="0" anchor="ctr"/>
+          <a:lstStyle/>
+          <a:p>
+            <a:pPr algn="ctr"/>
+            <a:endParaRPr lang="ko-KR" altLang="en-US" dirty="0"/>
+          </a:p>
+        </p:txBody>
+      </p:sp>
+      <p:sp>
+        <p:nvSpPr>
+          <p:cNvPr id="15" name="직사각형 14">
+            <a:extLst>
+              <a:ext uri="{FF2B5EF4-FFF2-40B4-BE49-F238E27FC236}">
+                <a16:creationId xmlns:a16="http://schemas.microsoft.com/office/drawing/2014/main" id="{6555C4A8-31E7-D4C9-D325-C626A1988FA1}"/>
+              </a:ext>
+            </a:extLst>
+          </p:cNvPr>
+          <p:cNvSpPr/>
+          <p:nvPr/>
+        </p:nvSpPr>
+        <p:spPr>
+          <a:xfrm>
+            <a:off x="769430" y="4012371"/>
+            <a:ext cx="4098134" cy="312523"/>
+          </a:xfrm>
+          <a:prstGeom prst="rect">
+            <a:avLst/>
+          </a:prstGeom>
+          <a:solidFill>
+            <a:schemeClr val="accent1">
+              <a:lumMod val="40000"/>
+              <a:lumOff val="60000"/>
+            </a:schemeClr>
+          </a:solidFill>
+          <a:ln>
+            <a:noFill/>
+          </a:ln>
+        </p:spPr>
+        <p:style>
+          <a:lnRef idx="2">
+            <a:schemeClr val="accent1">
+              <a:shade val="15000"/>
+            </a:schemeClr>
+          </a:lnRef>
+          <a:fillRef idx="1">
+            <a:schemeClr val="accent1"/>
+          </a:fillRef>
+          <a:effectRef idx="0">
+            <a:schemeClr val="accent1"/>
+          </a:effectRef>
+          <a:fontRef idx="minor">
+            <a:schemeClr val="lt1"/>
+          </a:fontRef>
+        </p:style>
+        <p:txBody>
+          <a:bodyPr rtlCol="0" anchor="ctr"/>
+          <a:lstStyle/>
+          <a:p>
+            <a:pPr algn="ctr"/>
+            <a:endParaRPr lang="ko-KR" altLang="en-US" dirty="0"/>
+          </a:p>
+        </p:txBody>
+      </p:sp>
+      <p:sp>
+        <p:nvSpPr>
+          <p:cNvPr id="17" name="직사각형 16">
+            <a:extLst>
+              <a:ext uri="{FF2B5EF4-FFF2-40B4-BE49-F238E27FC236}">
+                <a16:creationId xmlns:a16="http://schemas.microsoft.com/office/drawing/2014/main" id="{6096351A-D202-B797-712A-E09CBBCD9235}"/>
+              </a:ext>
+            </a:extLst>
+          </p:cNvPr>
+          <p:cNvSpPr/>
+          <p:nvPr/>
+        </p:nvSpPr>
+        <p:spPr>
+          <a:xfrm>
+            <a:off x="769430" y="4726586"/>
+            <a:ext cx="4098134" cy="312523"/>
+          </a:xfrm>
+          <a:prstGeom prst="rect">
+            <a:avLst/>
+          </a:prstGeom>
+          <a:solidFill>
+            <a:schemeClr val="accent1">
+              <a:lumMod val="40000"/>
+              <a:lumOff val="60000"/>
+            </a:schemeClr>
+          </a:solidFill>
+          <a:ln>
+            <a:noFill/>
+          </a:ln>
+        </p:spPr>
+        <p:style>
+          <a:lnRef idx="2">
+            <a:schemeClr val="accent1">
+              <a:shade val="15000"/>
+            </a:schemeClr>
+          </a:lnRef>
+          <a:fillRef idx="1">
+            <a:schemeClr val="accent1"/>
+          </a:fillRef>
+          <a:effectRef idx="0">
+            <a:schemeClr val="accent1"/>
+          </a:effectRef>
+          <a:fontRef idx="minor">
+            <a:schemeClr val="lt1"/>
+          </a:fontRef>
+        </p:style>
+        <p:txBody>
+          <a:bodyPr rtlCol="0" anchor="ctr"/>
+          <a:lstStyle/>
+          <a:p>
+            <a:pPr algn="ctr"/>
+            <a:endParaRPr lang="ko-KR" altLang="en-US" dirty="0"/>
+          </a:p>
+        </p:txBody>
+      </p:sp>
+      <p:sp>
+        <p:nvSpPr>
+          <p:cNvPr id="19" name="직사각형 18">
+            <a:extLst>
+              <a:ext uri="{FF2B5EF4-FFF2-40B4-BE49-F238E27FC236}">
+                <a16:creationId xmlns:a16="http://schemas.microsoft.com/office/drawing/2014/main" id="{D8205022-8FDE-6FD7-73A6-4F763322DDA0}"/>
+              </a:ext>
+            </a:extLst>
+          </p:cNvPr>
+          <p:cNvSpPr/>
+          <p:nvPr/>
+        </p:nvSpPr>
+        <p:spPr>
+          <a:xfrm>
+            <a:off x="769430" y="5413933"/>
+            <a:ext cx="4098134" cy="312523"/>
+          </a:xfrm>
+          <a:prstGeom prst="rect">
+            <a:avLst/>
+          </a:prstGeom>
+          <a:solidFill>
+            <a:schemeClr val="accent1">
+              <a:lumMod val="40000"/>
+              <a:lumOff val="60000"/>
+            </a:schemeClr>
+          </a:solidFill>
+          <a:ln>
+            <a:noFill/>
+          </a:ln>
+        </p:spPr>
+        <p:style>
+          <a:lnRef idx="2">
+            <a:schemeClr val="accent1">
+              <a:shade val="15000"/>
+            </a:schemeClr>
+          </a:lnRef>
+          <a:fillRef idx="1">
+            <a:schemeClr val="accent1"/>
+          </a:fillRef>
+          <a:effectRef idx="0">
+            <a:schemeClr val="accent1"/>
+          </a:effectRef>
+          <a:fontRef idx="minor">
+            <a:schemeClr val="lt1"/>
+          </a:fontRef>
+        </p:style>
+        <p:txBody>
+          <a:bodyPr rtlCol="0" anchor="ctr"/>
+          <a:lstStyle/>
+          <a:p>
+            <a:pPr algn="ctr"/>
+            <a:endParaRPr lang="ko-KR" altLang="en-US" dirty="0"/>
+          </a:p>
+        </p:txBody>
+      </p:sp>
+      <p:sp>
+        <p:nvSpPr>
+          <p:cNvPr id="21" name="직사각형 20">
+            <a:extLst>
+              <a:ext uri="{FF2B5EF4-FFF2-40B4-BE49-F238E27FC236}">
+                <a16:creationId xmlns:a16="http://schemas.microsoft.com/office/drawing/2014/main" id="{D583CE64-ADA3-BE04-DC4E-002BF48EC8B2}"/>
+              </a:ext>
+            </a:extLst>
+          </p:cNvPr>
+          <p:cNvSpPr/>
+          <p:nvPr/>
+        </p:nvSpPr>
+        <p:spPr>
+          <a:xfrm>
+            <a:off x="769430" y="6109676"/>
+            <a:ext cx="4098134" cy="312523"/>
+          </a:xfrm>
+          <a:prstGeom prst="rect">
+            <a:avLst/>
+          </a:prstGeom>
+          <a:solidFill>
+            <a:schemeClr val="accent1">
+              <a:lumMod val="40000"/>
+              <a:lumOff val="60000"/>
+            </a:schemeClr>
+          </a:solidFill>
+          <a:ln>
+            <a:noFill/>
+          </a:ln>
+        </p:spPr>
+        <p:style>
+          <a:lnRef idx="2">
+            <a:schemeClr val="accent1">
+              <a:shade val="15000"/>
+            </a:schemeClr>
+          </a:lnRef>
+          <a:fillRef idx="1">
+            <a:schemeClr val="accent1"/>
+          </a:fillRef>
+          <a:effectRef idx="0">
+            <a:schemeClr val="accent1"/>
+          </a:effectRef>
+          <a:fontRef idx="minor">
+            <a:schemeClr val="lt1"/>
+          </a:fontRef>
+        </p:style>
+        <p:txBody>
+          <a:bodyPr rtlCol="0" anchor="ctr"/>
+          <a:lstStyle/>
+          <a:p>
+            <a:pPr algn="ctr"/>
+            <a:endParaRPr lang="ko-KR" altLang="en-US" dirty="0"/>
+          </a:p>
+        </p:txBody>
+      </p:sp>
+      <p:sp>
+        <p:nvSpPr>
+          <p:cNvPr id="27" name="직사각형 26">
+            <a:extLst>
+              <a:ext uri="{FF2B5EF4-FFF2-40B4-BE49-F238E27FC236}">
+                <a16:creationId xmlns:a16="http://schemas.microsoft.com/office/drawing/2014/main" id="{6C8ABBEF-656A-DDF3-C7C8-F3BD8D78C832}"/>
+              </a:ext>
+            </a:extLst>
+          </p:cNvPr>
+          <p:cNvSpPr/>
+          <p:nvPr/>
+        </p:nvSpPr>
+        <p:spPr>
+          <a:xfrm>
+            <a:off x="769430" y="1905623"/>
+            <a:ext cx="4098134" cy="312523"/>
+          </a:xfrm>
+          <a:prstGeom prst="rect">
+            <a:avLst/>
+          </a:prstGeom>
+          <a:solidFill>
+            <a:schemeClr val="accent1">
+              <a:lumMod val="40000"/>
+              <a:lumOff val="60000"/>
+            </a:schemeClr>
+          </a:solidFill>
+          <a:ln>
+            <a:noFill/>
+          </a:ln>
+        </p:spPr>
+        <p:style>
+          <a:lnRef idx="2">
+            <a:schemeClr val="accent1">
+              <a:shade val="15000"/>
+            </a:schemeClr>
+          </a:lnRef>
+          <a:fillRef idx="1">
+            <a:schemeClr val="accent1"/>
+          </a:fillRef>
+          <a:effectRef idx="0">
+            <a:schemeClr val="accent1"/>
+          </a:effectRef>
+          <a:fontRef idx="minor">
+            <a:schemeClr val="lt1"/>
+          </a:fontRef>
+        </p:style>
+        <p:txBody>
+          <a:bodyPr rtlCol="0" anchor="ctr"/>
+          <a:lstStyle/>
+          <a:p>
+            <a:pPr algn="ctr"/>
+            <a:endParaRPr lang="ko-KR" altLang="en-US" dirty="0"/>
+          </a:p>
+        </p:txBody>
+      </p:sp>
+      <p:sp>
+        <p:nvSpPr>
+          <p:cNvPr id="7" name="직사각형 6">
+            <a:extLst>
+              <a:ext uri="{FF2B5EF4-FFF2-40B4-BE49-F238E27FC236}">
+                <a16:creationId xmlns:a16="http://schemas.microsoft.com/office/drawing/2014/main" id="{0DAE983F-7030-7D54-B8FE-23516BE274DD}"/>
+              </a:ext>
+            </a:extLst>
+          </p:cNvPr>
+          <p:cNvSpPr/>
+          <p:nvPr/>
+        </p:nvSpPr>
+        <p:spPr>
+          <a:xfrm>
+            <a:off x="769430" y="1266054"/>
+            <a:ext cx="4098134" cy="312523"/>
+          </a:xfrm>
+          <a:prstGeom prst="rect">
+            <a:avLst/>
+          </a:prstGeom>
+          <a:solidFill>
+            <a:schemeClr val="accent1">
+              <a:lumMod val="40000"/>
+              <a:lumOff val="60000"/>
+            </a:schemeClr>
+          </a:solidFill>
+          <a:ln>
+            <a:noFill/>
+          </a:ln>
+        </p:spPr>
+        <p:style>
+          <a:lnRef idx="2">
+            <a:schemeClr val="accent1">
+              <a:shade val="15000"/>
+            </a:schemeClr>
+          </a:lnRef>
+          <a:fillRef idx="1">
+            <a:schemeClr val="accent1"/>
+          </a:fillRef>
+          <a:effectRef idx="0">
+            <a:schemeClr val="accent1"/>
+          </a:effectRef>
+          <a:fontRef idx="minor">
+            <a:schemeClr val="lt1"/>
+          </a:fontRef>
+        </p:style>
+        <p:txBody>
+          <a:bodyPr rtlCol="0" anchor="ctr"/>
+          <a:lstStyle/>
+          <a:p>
+            <a:pPr algn="ctr"/>
+            <a:endParaRPr lang="ko-KR" altLang="en-US" dirty="0"/>
+          </a:p>
+        </p:txBody>
+      </p:sp>
+      <p:sp>
+        <p:nvSpPr>
           <p:cNvPr id="3" name="제목 1">
             <a:extLst>
               <a:ext uri="{FF2B5EF4-FFF2-40B4-BE49-F238E27FC236}">
-                <a16:creationId xmlns:a16="http://schemas.microsoft.com/office/drawing/2014/main" id="{93BC72C1-8F8B-BCD1-1512-760B19BD2F60}"/>
+                <a16:creationId xmlns:a16="http://schemas.microsoft.com/office/drawing/2014/main" id="{F692B6DF-7C9C-A169-093C-6A17B09A8558}"/>
               </a:ext>
             </a:extLst>
           </p:cNvPr>
@@ -5853,7 +6295,7 @@
           <p:cNvPr id="2" name="제목 1">
             <a:extLst>
               <a:ext uri="{FF2B5EF4-FFF2-40B4-BE49-F238E27FC236}">
-                <a16:creationId xmlns:a16="http://schemas.microsoft.com/office/drawing/2014/main" id="{CC076143-D16D-C638-5908-95C3A9097020}"/>
+                <a16:creationId xmlns:a16="http://schemas.microsoft.com/office/drawing/2014/main" id="{CD35CD2E-3A82-1A38-0FFD-478E0ECA18A1}"/>
               </a:ext>
             </a:extLst>
           </p:cNvPr>
@@ -5902,14 +6344,37 @@
                 <a:latin typeface="D2Coding" panose="020B0609020101020101" pitchFamily="49" charset="-127"/>
                 <a:ea typeface="D2Coding" panose="020B0609020101020101" pitchFamily="49" charset="-127"/>
               </a:rPr>
-              <a:t>Dive into LLM Fundamentals with </a:t>
-            </a:r>
-            <a:r>
-              <a:rPr lang="en-US" altLang="ko-KR" sz="2800" cap="none" dirty="0" err="1">
-                <a:latin typeface="D2Coding" panose="020B0609020101020101" pitchFamily="49" charset="-127"/>
-                <a:ea typeface="D2Coding" panose="020B0609020101020101" pitchFamily="49" charset="-127"/>
-              </a:rPr>
-              <a:t>LangChain</a:t>
+              <a:t>Core</a:t>
+            </a:r>
+            <a:r>
+              <a:rPr lang="ko-KR" altLang="en-US" sz="2800" cap="none" dirty="0">
+                <a:latin typeface="D2Coding" panose="020B0609020101020101" pitchFamily="49" charset="-127"/>
+                <a:ea typeface="D2Coding" panose="020B0609020101020101" pitchFamily="49" charset="-127"/>
+              </a:rPr>
+              <a:t> </a:t>
+            </a:r>
+            <a:r>
+              <a:rPr lang="en-US" altLang="ko-KR" sz="2800" cap="none" dirty="0">
+                <a:latin typeface="D2Coding" panose="020B0609020101020101" pitchFamily="49" charset="-127"/>
+                <a:ea typeface="D2Coding" panose="020B0609020101020101" pitchFamily="49" charset="-127"/>
+              </a:rPr>
+              <a:t>Components </a:t>
+            </a:r>
+            <a:r>
+              <a:rPr lang="en-US" altLang="ko-KR" sz="1800" cap="none" dirty="0" err="1">
+                <a:latin typeface="D2Coding" panose="020B0609020101020101" pitchFamily="49" charset="-127"/>
+                <a:ea typeface="D2Coding" panose="020B0609020101020101" pitchFamily="49" charset="-127"/>
+                <a:hlinkClick r:id="rId2"/>
+              </a:rPr>
+              <a:t>Langchain</a:t>
+            </a:r>
+            <a:r>
+              <a:rPr lang="en-US" altLang="ko-KR" sz="1800" cap="none" dirty="0">
+                <a:latin typeface="D2Coding" panose="020B0609020101020101" pitchFamily="49" charset="-127"/>
+                <a:ea typeface="D2Coding" panose="020B0609020101020101" pitchFamily="49" charset="-127"/>
+                <a:hlinkClick r:id="rId2"/>
+              </a:rPr>
+              <a:t> Docs</a:t>
             </a:r>
             <a:endParaRPr lang="en-US" altLang="ko-KR" sz="2800" cap="none" dirty="0">
               <a:latin typeface="D2Coding" panose="020B0609020101020101" pitchFamily="49" charset="-127"/>
@@ -5923,7 +6388,7 @@
           <p:cNvPr id="5" name="슬라이드 번호 개체 틀 3">
             <a:extLst>
               <a:ext uri="{FF2B5EF4-FFF2-40B4-BE49-F238E27FC236}">
-                <a16:creationId xmlns:a16="http://schemas.microsoft.com/office/drawing/2014/main" id="{D59735E0-7504-7A8D-EF92-EEB2DEFE25DA}"/>
+                <a16:creationId xmlns:a16="http://schemas.microsoft.com/office/drawing/2014/main" id="{E5018B7C-77DB-1AEE-60A5-768486BFBBCA}"/>
               </a:ext>
             </a:extLst>
           </p:cNvPr>
@@ -5961,42 +6426,12 @@
           </a:p>
         </p:txBody>
       </p:sp>
-      <p:pic>
-        <p:nvPicPr>
-          <p:cNvPr id="12" name="그림 11">
-            <a:extLst>
-              <a:ext uri="{FF2B5EF4-FFF2-40B4-BE49-F238E27FC236}">
-                <a16:creationId xmlns:a16="http://schemas.microsoft.com/office/drawing/2014/main" id="{D8A98425-E80D-E2E4-D1C5-23D4BFA3078E}"/>
-              </a:ext>
-            </a:extLst>
-          </p:cNvPr>
-          <p:cNvPicPr>
-            <a:picLocks noChangeAspect="1"/>
-          </p:cNvPicPr>
-          <p:nvPr/>
-        </p:nvPicPr>
-        <p:blipFill>
-          <a:blip r:embed="rId2"/>
-          <a:stretch>
-            <a:fillRect/>
-          </a:stretch>
-        </p:blipFill>
-        <p:spPr>
-          <a:xfrm>
-            <a:off x="1819275" y="1823523"/>
-            <a:ext cx="8010085" cy="4552494"/>
-          </a:xfrm>
-          <a:prstGeom prst="rect">
-            <a:avLst/>
-          </a:prstGeom>
-        </p:spPr>
-      </p:pic>
       <p:sp>
         <p:nvSpPr>
           <p:cNvPr id="6" name="TextBox 5">
             <a:extLst>
               <a:ext uri="{FF2B5EF4-FFF2-40B4-BE49-F238E27FC236}">
-                <a16:creationId xmlns:a16="http://schemas.microsoft.com/office/drawing/2014/main" id="{D5A0F647-5DCC-9369-B195-3DBD957974A3}"/>
+                <a16:creationId xmlns:a16="http://schemas.microsoft.com/office/drawing/2014/main" id="{67F9AA7C-3C05-4BC6-CC38-C57A1908E3D8}"/>
               </a:ext>
             </a:extLst>
           </p:cNvPr>
@@ -6005,8 +6440,8 @@
         </p:nvSpPr>
         <p:spPr>
           <a:xfrm>
-            <a:off x="625201" y="1351306"/>
-            <a:ext cx="8077200" cy="338554"/>
+            <a:off x="800692" y="1248422"/>
+            <a:ext cx="11391308" cy="5478423"/>
           </a:xfrm>
           <a:prstGeom prst="rect">
             <a:avLst/>
@@ -6019,47 +6454,524 @@
           </a:bodyPr>
           <a:lstStyle/>
           <a:p>
-            <a:r>
-              <a:rPr lang="en-US" altLang="ko-KR" sz="1600" dirty="0">
-                <a:latin typeface="D2Coding" panose="020B0609020101020101" pitchFamily="49" charset="-127"/>
-                <a:ea typeface="D2Coding" panose="020B0609020101020101" pitchFamily="49" charset="-127"/>
-              </a:rPr>
-              <a:t>Click</a:t>
-            </a:r>
-            <a:r>
-              <a:rPr lang="ko-KR" altLang="en-US" sz="1600" dirty="0">
-                <a:latin typeface="D2Coding" panose="020B0609020101020101" pitchFamily="49" charset="-127"/>
-                <a:ea typeface="D2Coding" panose="020B0609020101020101" pitchFamily="49" charset="-127"/>
-              </a:rPr>
-              <a:t> </a:t>
-            </a:r>
-            <a:r>
-              <a:rPr lang="en-US" altLang="ko-KR" sz="1600" dirty="0">
-                <a:latin typeface="D2Coding" panose="020B0609020101020101" pitchFamily="49" charset="-127"/>
-                <a:ea typeface="D2Coding" panose="020B0609020101020101" pitchFamily="49" charset="-127"/>
-                <a:hlinkClick r:id="rId3"/>
-              </a:rPr>
-              <a:t>CH1_LLM_Fundamentals with </a:t>
-            </a:r>
-            <a:r>
-              <a:rPr lang="en-US" altLang="ko-KR" sz="1600" dirty="0" err="1">
-                <a:latin typeface="D2Coding" panose="020B0609020101020101" pitchFamily="49" charset="-127"/>
-                <a:ea typeface="D2Coding" panose="020B0609020101020101" pitchFamily="49" charset="-127"/>
-                <a:hlinkClick r:id="rId3"/>
-              </a:rPr>
-              <a:t>LangChain.ipynb</a:t>
-            </a:r>
-            <a:endParaRPr lang="ko-KR" altLang="en-US" sz="1600" dirty="0">
+            <a:pPr marL="342900" lvl="0" indent="-342900">
+              <a:buFont typeface="Wingdings" panose="05000000000000000000" pitchFamily="2" charset="2"/>
+              <a:buChar char="§"/>
+            </a:pPr>
+            <a:r>
+              <a:rPr lang="ko-KR" altLang="ko-KR" sz="1600" b="1" dirty="0" err="1">
+                <a:latin typeface="D2Coding" panose="020B0609020101020101" pitchFamily="49" charset="-127"/>
+                <a:ea typeface="D2Coding" panose="020B0609020101020101" pitchFamily="49" charset="-127"/>
+              </a:rPr>
+              <a:t>Agents</a:t>
+            </a:r>
+            <a:r>
+              <a:rPr lang="ko-KR" altLang="ko-KR" sz="1600" b="1" dirty="0">
+                <a:latin typeface="D2Coding" panose="020B0609020101020101" pitchFamily="49" charset="-127"/>
+                <a:ea typeface="D2Coding" panose="020B0609020101020101" pitchFamily="49" charset="-127"/>
+              </a:rPr>
+              <a:t> (에이전트):</a:t>
+            </a:r>
+          </a:p>
+          <a:p>
+            <a:pPr marL="742950" lvl="1" indent="-285750">
+              <a:buFont typeface="Wingdings" panose="05000000000000000000" pitchFamily="2" charset="2"/>
+              <a:buChar char="§"/>
+            </a:pPr>
+            <a:r>
+              <a:rPr lang="ko-KR" altLang="ko-KR" sz="1400" dirty="0">
+                <a:latin typeface="D2Coding" panose="020B0609020101020101" pitchFamily="49" charset="-127"/>
+                <a:ea typeface="D2Coding" panose="020B0609020101020101" pitchFamily="49" charset="-127"/>
+              </a:rPr>
+              <a:t>모델이 스스로 판단하여 주어진 작업을 끝낼 때까지 도구(</a:t>
+            </a:r>
+            <a:r>
+              <a:rPr lang="ko-KR" altLang="ko-KR" sz="1400" dirty="0" err="1">
+                <a:latin typeface="D2Coding" panose="020B0609020101020101" pitchFamily="49" charset="-127"/>
+                <a:ea typeface="D2Coding" panose="020B0609020101020101" pitchFamily="49" charset="-127"/>
+              </a:rPr>
+              <a:t>Tools</a:t>
+            </a:r>
+            <a:r>
+              <a:rPr lang="ko-KR" altLang="ko-KR" sz="1400" dirty="0">
+                <a:latin typeface="D2Coding" panose="020B0609020101020101" pitchFamily="49" charset="-127"/>
+                <a:ea typeface="D2Coding" panose="020B0609020101020101" pitchFamily="49" charset="-127"/>
+              </a:rPr>
+              <a:t>)</a:t>
+            </a:r>
+            <a:r>
+              <a:rPr lang="ko-KR" altLang="ko-KR" sz="1400" dirty="0" err="1">
+                <a:latin typeface="D2Coding" panose="020B0609020101020101" pitchFamily="49" charset="-127"/>
+                <a:ea typeface="D2Coding" panose="020B0609020101020101" pitchFamily="49" charset="-127"/>
+              </a:rPr>
+              <a:t>를</a:t>
+            </a:r>
+            <a:r>
+              <a:rPr lang="ko-KR" altLang="ko-KR" sz="1400" dirty="0">
+                <a:latin typeface="D2Coding" panose="020B0609020101020101" pitchFamily="49" charset="-127"/>
+                <a:ea typeface="D2Coding" panose="020B0609020101020101" pitchFamily="49" charset="-127"/>
+              </a:rPr>
+              <a:t> 반복해서 호출하고 실행하는 지능형 시스템</a:t>
+            </a:r>
+            <a:endParaRPr lang="en-US" altLang="ko-KR" sz="1400" dirty="0">
               <a:latin typeface="D2Coding" panose="020B0609020101020101" pitchFamily="49" charset="-127"/>
               <a:ea typeface="D2Coding" panose="020B0609020101020101" pitchFamily="49" charset="-127"/>
             </a:endParaRPr>
           </a:p>
+          <a:p>
+            <a:pPr marL="742950" lvl="1" indent="-285750">
+              <a:buFont typeface="Wingdings" panose="05000000000000000000" pitchFamily="2" charset="2"/>
+              <a:buChar char="§"/>
+            </a:pPr>
+            <a:endParaRPr lang="ko-KR" altLang="ko-KR" sz="1400" dirty="0">
+              <a:latin typeface="D2Coding" panose="020B0609020101020101" pitchFamily="49" charset="-127"/>
+              <a:ea typeface="D2Coding" panose="020B0609020101020101" pitchFamily="49" charset="-127"/>
+            </a:endParaRPr>
+          </a:p>
+          <a:p>
+            <a:pPr marL="342900" lvl="0" indent="-342900">
+              <a:buFont typeface="Wingdings" panose="05000000000000000000" pitchFamily="2" charset="2"/>
+              <a:buChar char="§"/>
+            </a:pPr>
+            <a:r>
+              <a:rPr lang="ko-KR" altLang="ko-KR" sz="1600" b="1" dirty="0" err="1">
+                <a:latin typeface="D2Coding" panose="020B0609020101020101" pitchFamily="49" charset="-127"/>
+                <a:ea typeface="D2Coding" panose="020B0609020101020101" pitchFamily="49" charset="-127"/>
+              </a:rPr>
+              <a:t>Models</a:t>
+            </a:r>
+            <a:r>
+              <a:rPr lang="ko-KR" altLang="ko-KR" sz="1600" b="1" dirty="0">
+                <a:latin typeface="D2Coding" panose="020B0609020101020101" pitchFamily="49" charset="-127"/>
+                <a:ea typeface="D2Coding" panose="020B0609020101020101" pitchFamily="49" charset="-127"/>
+              </a:rPr>
+              <a:t> (모델):</a:t>
+            </a:r>
+          </a:p>
+          <a:p>
+            <a:pPr marL="742950" lvl="1" indent="-285750">
+              <a:buFont typeface="Wingdings" panose="05000000000000000000" pitchFamily="2" charset="2"/>
+              <a:buChar char="§"/>
+            </a:pPr>
+            <a:r>
+              <a:rPr lang="ko-KR" altLang="ko-KR" sz="1400" dirty="0" err="1">
+                <a:latin typeface="D2Coding" panose="020B0609020101020101" pitchFamily="49" charset="-127"/>
+                <a:ea typeface="D2Coding" panose="020B0609020101020101" pitchFamily="49" charset="-127"/>
+              </a:rPr>
+              <a:t>OpenAI</a:t>
+            </a:r>
+            <a:r>
+              <a:rPr lang="ko-KR" altLang="ko-KR" sz="1400" dirty="0">
+                <a:latin typeface="D2Coding" panose="020B0609020101020101" pitchFamily="49" charset="-127"/>
+                <a:ea typeface="D2Coding" panose="020B0609020101020101" pitchFamily="49" charset="-127"/>
+              </a:rPr>
+              <a:t>, </a:t>
+            </a:r>
+            <a:r>
+              <a:rPr lang="ko-KR" altLang="ko-KR" sz="1400" dirty="0" err="1">
+                <a:latin typeface="D2Coding" panose="020B0609020101020101" pitchFamily="49" charset="-127"/>
+                <a:ea typeface="D2Coding" panose="020B0609020101020101" pitchFamily="49" charset="-127"/>
+              </a:rPr>
+              <a:t>Anthropic</a:t>
+            </a:r>
+            <a:r>
+              <a:rPr lang="ko-KR" altLang="ko-KR" sz="1400" dirty="0">
+                <a:latin typeface="D2Coding" panose="020B0609020101020101" pitchFamily="49" charset="-127"/>
+                <a:ea typeface="D2Coding" panose="020B0609020101020101" pitchFamily="49" charset="-127"/>
+              </a:rPr>
+              <a:t> 등의 LLM(언어 모델) 이나 </a:t>
+            </a:r>
+            <a:r>
+              <a:rPr lang="ko-KR" altLang="ko-KR" sz="1400" dirty="0" err="1">
+                <a:latin typeface="D2Coding" panose="020B0609020101020101" pitchFamily="49" charset="-127"/>
+                <a:ea typeface="D2Coding" panose="020B0609020101020101" pitchFamily="49" charset="-127"/>
+              </a:rPr>
+              <a:t>임베딩</a:t>
+            </a:r>
+            <a:r>
+              <a:rPr lang="ko-KR" altLang="ko-KR" sz="1400" dirty="0">
+                <a:latin typeface="D2Coding" panose="020B0609020101020101" pitchFamily="49" charset="-127"/>
+                <a:ea typeface="D2Coding" panose="020B0609020101020101" pitchFamily="49" charset="-127"/>
+              </a:rPr>
+              <a:t> 모델과 상호작용하기 위한 표준화된 인터페이스</a:t>
+            </a:r>
+          </a:p>
+          <a:p>
+            <a:pPr marL="342900" lvl="0" indent="-342900">
+              <a:buFont typeface="Wingdings" panose="05000000000000000000" pitchFamily="2" charset="2"/>
+              <a:buChar char="§"/>
+            </a:pPr>
+            <a:endParaRPr lang="en-US" altLang="ko-KR" sz="1600" b="1" dirty="0">
+              <a:latin typeface="D2Coding" panose="020B0609020101020101" pitchFamily="49" charset="-127"/>
+              <a:ea typeface="D2Coding" panose="020B0609020101020101" pitchFamily="49" charset="-127"/>
+            </a:endParaRPr>
+          </a:p>
+          <a:p>
+            <a:pPr marL="342900" lvl="0" indent="-342900">
+              <a:buFont typeface="Wingdings" panose="05000000000000000000" pitchFamily="2" charset="2"/>
+              <a:buChar char="§"/>
+            </a:pPr>
+            <a:r>
+              <a:rPr lang="ko-KR" altLang="ko-KR" sz="1600" b="1" dirty="0" err="1">
+                <a:latin typeface="D2Coding" panose="020B0609020101020101" pitchFamily="49" charset="-127"/>
+                <a:ea typeface="D2Coding" panose="020B0609020101020101" pitchFamily="49" charset="-127"/>
+              </a:rPr>
+              <a:t>Messages</a:t>
+            </a:r>
+            <a:r>
+              <a:rPr lang="ko-KR" altLang="ko-KR" sz="1600" b="1" dirty="0">
+                <a:latin typeface="D2Coding" panose="020B0609020101020101" pitchFamily="49" charset="-127"/>
+                <a:ea typeface="D2Coding" panose="020B0609020101020101" pitchFamily="49" charset="-127"/>
+              </a:rPr>
+              <a:t> (메시지):</a:t>
+            </a:r>
+          </a:p>
+          <a:p>
+            <a:pPr marL="742950" lvl="1" indent="-285750">
+              <a:buFont typeface="Wingdings" panose="05000000000000000000" pitchFamily="2" charset="2"/>
+              <a:buChar char="§"/>
+            </a:pPr>
+            <a:r>
+              <a:rPr lang="ko-KR" altLang="ko-KR" sz="1400" dirty="0">
+                <a:latin typeface="D2Coding" panose="020B0609020101020101" pitchFamily="49" charset="-127"/>
+                <a:ea typeface="D2Coding" panose="020B0609020101020101" pitchFamily="49" charset="-127"/>
+              </a:rPr>
+              <a:t>모델과 주고받는 대화의 기본 단위입니다. 내용(</a:t>
+            </a:r>
+            <a:r>
+              <a:rPr lang="ko-KR" altLang="ko-KR" sz="1400" dirty="0" err="1">
+                <a:latin typeface="D2Coding" panose="020B0609020101020101" pitchFamily="49" charset="-127"/>
+                <a:ea typeface="D2Coding" panose="020B0609020101020101" pitchFamily="49" charset="-127"/>
+              </a:rPr>
+              <a:t>Content</a:t>
+            </a:r>
+            <a:r>
+              <a:rPr lang="ko-KR" altLang="ko-KR" sz="1400" dirty="0">
+                <a:latin typeface="D2Coding" panose="020B0609020101020101" pitchFamily="49" charset="-127"/>
+                <a:ea typeface="D2Coding" panose="020B0609020101020101" pitchFamily="49" charset="-127"/>
+              </a:rPr>
+              <a:t>)과 메타데이터를 포함하여 대화 상태를 표현</a:t>
+            </a:r>
+          </a:p>
+          <a:p>
+            <a:pPr marL="342900" lvl="0" indent="-342900">
+              <a:buFont typeface="Wingdings" panose="05000000000000000000" pitchFamily="2" charset="2"/>
+              <a:buChar char="§"/>
+            </a:pPr>
+            <a:endParaRPr lang="en-US" altLang="ko-KR" sz="1600" b="1" dirty="0">
+              <a:latin typeface="D2Coding" panose="020B0609020101020101" pitchFamily="49" charset="-127"/>
+              <a:ea typeface="D2Coding" panose="020B0609020101020101" pitchFamily="49" charset="-127"/>
+            </a:endParaRPr>
+          </a:p>
+          <a:p>
+            <a:pPr marL="342900" lvl="0" indent="-342900">
+              <a:buFont typeface="Wingdings" panose="05000000000000000000" pitchFamily="2" charset="2"/>
+              <a:buChar char="§"/>
+            </a:pPr>
+            <a:r>
+              <a:rPr lang="ko-KR" altLang="ko-KR" sz="1600" b="1" dirty="0" err="1">
+                <a:latin typeface="D2Coding" panose="020B0609020101020101" pitchFamily="49" charset="-127"/>
+                <a:ea typeface="D2Coding" panose="020B0609020101020101" pitchFamily="49" charset="-127"/>
+              </a:rPr>
+              <a:t>Tools</a:t>
+            </a:r>
+            <a:r>
+              <a:rPr lang="ko-KR" altLang="ko-KR" sz="1600" b="1" dirty="0">
+                <a:latin typeface="D2Coding" panose="020B0609020101020101" pitchFamily="49" charset="-127"/>
+                <a:ea typeface="D2Coding" panose="020B0609020101020101" pitchFamily="49" charset="-127"/>
+              </a:rPr>
+              <a:t> (도구):</a:t>
+            </a:r>
+          </a:p>
+          <a:p>
+            <a:pPr marL="742950" lvl="1" indent="-285750">
+              <a:buFont typeface="Wingdings" panose="05000000000000000000" pitchFamily="2" charset="2"/>
+              <a:buChar char="§"/>
+            </a:pPr>
+            <a:r>
+              <a:rPr lang="ko-KR" altLang="ko-KR" sz="1400" dirty="0">
+                <a:latin typeface="D2Coding" panose="020B0609020101020101" pitchFamily="49" charset="-127"/>
+                <a:ea typeface="D2Coding" panose="020B0609020101020101" pitchFamily="49" charset="-127"/>
+              </a:rPr>
+              <a:t>에이전트가 외부 세계와 상호작용하거나 계산, 검색 등 특정 작업을 수행할 수 있도</a:t>
+            </a:r>
+            <a:r>
+              <a:rPr lang="ko-KR" altLang="en-US" sz="1400" dirty="0">
+                <a:latin typeface="D2Coding" panose="020B0609020101020101" pitchFamily="49" charset="-127"/>
+                <a:ea typeface="D2Coding" panose="020B0609020101020101" pitchFamily="49" charset="-127"/>
+              </a:rPr>
+              <a:t>록</a:t>
+            </a:r>
+            <a:r>
+              <a:rPr lang="en-US" altLang="ko-KR" sz="1400" dirty="0">
+                <a:latin typeface="D2Coding" panose="020B0609020101020101" pitchFamily="49" charset="-127"/>
+                <a:ea typeface="D2Coding" panose="020B0609020101020101" pitchFamily="49" charset="-127"/>
+              </a:rPr>
+              <a:t> </a:t>
+            </a:r>
+            <a:r>
+              <a:rPr lang="ko-KR" altLang="en-US" sz="1400" dirty="0">
+                <a:latin typeface="D2Coding" panose="020B0609020101020101" pitchFamily="49" charset="-127"/>
+                <a:ea typeface="D2Coding" panose="020B0609020101020101" pitchFamily="49" charset="-127"/>
+              </a:rPr>
+              <a:t>하는 </a:t>
+            </a:r>
+            <a:r>
+              <a:rPr lang="ko-KR" altLang="ko-KR" sz="1400" dirty="0">
+                <a:latin typeface="D2Coding" panose="020B0609020101020101" pitchFamily="49" charset="-127"/>
+                <a:ea typeface="D2Coding" panose="020B0609020101020101" pitchFamily="49" charset="-127"/>
+              </a:rPr>
+              <a:t>기능(함수)</a:t>
+            </a:r>
+          </a:p>
+          <a:p>
+            <a:pPr marL="342900" lvl="0" indent="-342900">
+              <a:buFont typeface="Wingdings" panose="05000000000000000000" pitchFamily="2" charset="2"/>
+              <a:buChar char="§"/>
+            </a:pPr>
+            <a:endParaRPr lang="en-US" altLang="ko-KR" sz="1600" b="1" dirty="0">
+              <a:latin typeface="D2Coding" panose="020B0609020101020101" pitchFamily="49" charset="-127"/>
+              <a:ea typeface="D2Coding" panose="020B0609020101020101" pitchFamily="49" charset="-127"/>
+            </a:endParaRPr>
+          </a:p>
+          <a:p>
+            <a:pPr marL="342900" lvl="0" indent="-342900">
+              <a:buFont typeface="Wingdings" panose="05000000000000000000" pitchFamily="2" charset="2"/>
+              <a:buChar char="§"/>
+            </a:pPr>
+            <a:r>
+              <a:rPr lang="ko-KR" altLang="ko-KR" sz="1600" b="1" dirty="0" err="1">
+                <a:latin typeface="D2Coding" panose="020B0609020101020101" pitchFamily="49" charset="-127"/>
+                <a:ea typeface="D2Coding" panose="020B0609020101020101" pitchFamily="49" charset="-127"/>
+              </a:rPr>
+              <a:t>Short-term</a:t>
+            </a:r>
+            <a:r>
+              <a:rPr lang="ko-KR" altLang="ko-KR" sz="1600" b="1" dirty="0">
+                <a:latin typeface="D2Coding" panose="020B0609020101020101" pitchFamily="49" charset="-127"/>
+                <a:ea typeface="D2Coding" panose="020B0609020101020101" pitchFamily="49" charset="-127"/>
+              </a:rPr>
+              <a:t> </a:t>
+            </a:r>
+            <a:r>
+              <a:rPr lang="ko-KR" altLang="ko-KR" sz="1600" b="1" dirty="0" err="1">
+                <a:latin typeface="D2Coding" panose="020B0609020101020101" pitchFamily="49" charset="-127"/>
+                <a:ea typeface="D2Coding" panose="020B0609020101020101" pitchFamily="49" charset="-127"/>
+              </a:rPr>
+              <a:t>memory</a:t>
+            </a:r>
+            <a:r>
+              <a:rPr lang="ko-KR" altLang="ko-KR" sz="1600" b="1" dirty="0">
+                <a:latin typeface="D2Coding" panose="020B0609020101020101" pitchFamily="49" charset="-127"/>
+                <a:ea typeface="D2Coding" panose="020B0609020101020101" pitchFamily="49" charset="-127"/>
+              </a:rPr>
+              <a:t> (단기 기억):</a:t>
+            </a:r>
+          </a:p>
+          <a:p>
+            <a:pPr marL="742950" lvl="1" indent="-285750">
+              <a:buFont typeface="Wingdings" panose="05000000000000000000" pitchFamily="2" charset="2"/>
+              <a:buChar char="§"/>
+            </a:pPr>
+            <a:r>
+              <a:rPr lang="ko-KR" altLang="ko-KR" sz="1400" dirty="0">
+                <a:latin typeface="D2Coding" panose="020B0609020101020101" pitchFamily="49" charset="-127"/>
+                <a:ea typeface="D2Coding" panose="020B0609020101020101" pitchFamily="49" charset="-127"/>
+              </a:rPr>
+              <a:t>대화나 작업 진행 상황(상태)을 기억하여, 이전 맥락을 잃지 않고 이어갈 수 있도록 돕는 메모리 기능</a:t>
+            </a:r>
+          </a:p>
+          <a:p>
+            <a:pPr marL="342900" lvl="0" indent="-342900">
+              <a:buFont typeface="Wingdings" panose="05000000000000000000" pitchFamily="2" charset="2"/>
+              <a:buChar char="§"/>
+            </a:pPr>
+            <a:endParaRPr lang="en-US" altLang="ko-KR" sz="1600" b="1" dirty="0">
+              <a:latin typeface="D2Coding" panose="020B0609020101020101" pitchFamily="49" charset="-127"/>
+              <a:ea typeface="D2Coding" panose="020B0609020101020101" pitchFamily="49" charset="-127"/>
+            </a:endParaRPr>
+          </a:p>
+          <a:p>
+            <a:pPr marL="342900" lvl="0" indent="-342900">
+              <a:buFont typeface="Wingdings" panose="05000000000000000000" pitchFamily="2" charset="2"/>
+              <a:buChar char="§"/>
+            </a:pPr>
+            <a:r>
+              <a:rPr lang="ko-KR" altLang="ko-KR" sz="1600" b="1" dirty="0" err="1">
+                <a:latin typeface="D2Coding" panose="020B0609020101020101" pitchFamily="49" charset="-127"/>
+                <a:ea typeface="D2Coding" panose="020B0609020101020101" pitchFamily="49" charset="-127"/>
+              </a:rPr>
+              <a:t>Event</a:t>
+            </a:r>
+            <a:r>
+              <a:rPr lang="ko-KR" altLang="ko-KR" sz="1600" b="1" dirty="0">
+                <a:latin typeface="D2Coding" panose="020B0609020101020101" pitchFamily="49" charset="-127"/>
+                <a:ea typeface="D2Coding" panose="020B0609020101020101" pitchFamily="49" charset="-127"/>
+              </a:rPr>
+              <a:t> </a:t>
+            </a:r>
+            <a:r>
+              <a:rPr lang="ko-KR" altLang="ko-KR" sz="1600" b="1" dirty="0" err="1">
+                <a:latin typeface="D2Coding" panose="020B0609020101020101" pitchFamily="49" charset="-127"/>
+                <a:ea typeface="D2Coding" panose="020B0609020101020101" pitchFamily="49" charset="-127"/>
+              </a:rPr>
+              <a:t>streaming</a:t>
+            </a:r>
+            <a:r>
+              <a:rPr lang="ko-KR" altLang="ko-KR" sz="1600" b="1" dirty="0">
+                <a:latin typeface="D2Coding" panose="020B0609020101020101" pitchFamily="49" charset="-127"/>
+                <a:ea typeface="D2Coding" panose="020B0609020101020101" pitchFamily="49" charset="-127"/>
+              </a:rPr>
+              <a:t> (이벤트 스트리밍):</a:t>
+            </a:r>
+          </a:p>
+          <a:p>
+            <a:pPr marL="742950" lvl="1" indent="-285750">
+              <a:buFont typeface="Wingdings" panose="05000000000000000000" pitchFamily="2" charset="2"/>
+              <a:buChar char="§"/>
+            </a:pPr>
+            <a:r>
+              <a:rPr lang="ko-KR" altLang="ko-KR" sz="1400" dirty="0">
+                <a:latin typeface="D2Coding" panose="020B0609020101020101" pitchFamily="49" charset="-127"/>
+                <a:ea typeface="D2Coding" panose="020B0609020101020101" pitchFamily="49" charset="-127"/>
+              </a:rPr>
+              <a:t>에이전트가 실행되는 동안 발생하는 내부 이벤트나 과정을 실시간으로 추적하고 전달하는 메커니즘</a:t>
+            </a:r>
+          </a:p>
+          <a:p>
+            <a:pPr marL="342900" lvl="0" indent="-342900">
+              <a:buFont typeface="Wingdings" panose="05000000000000000000" pitchFamily="2" charset="2"/>
+              <a:buChar char="§"/>
+            </a:pPr>
+            <a:endParaRPr lang="en-US" altLang="ko-KR" sz="1600" b="1" dirty="0">
+              <a:latin typeface="D2Coding" panose="020B0609020101020101" pitchFamily="49" charset="-127"/>
+              <a:ea typeface="D2Coding" panose="020B0609020101020101" pitchFamily="49" charset="-127"/>
+            </a:endParaRPr>
+          </a:p>
+          <a:p>
+            <a:pPr marL="342900" lvl="0" indent="-342900">
+              <a:buFont typeface="Wingdings" panose="05000000000000000000" pitchFamily="2" charset="2"/>
+              <a:buChar char="§"/>
+            </a:pPr>
+            <a:r>
+              <a:rPr lang="ko-KR" altLang="ko-KR" sz="1600" b="1" dirty="0" err="1">
+                <a:latin typeface="D2Coding" panose="020B0609020101020101" pitchFamily="49" charset="-127"/>
+                <a:ea typeface="D2Coding" panose="020B0609020101020101" pitchFamily="49" charset="-127"/>
+              </a:rPr>
+              <a:t>Streaming</a:t>
+            </a:r>
+            <a:r>
+              <a:rPr lang="ko-KR" altLang="ko-KR" sz="1600" b="1" dirty="0">
+                <a:latin typeface="D2Coding" panose="020B0609020101020101" pitchFamily="49" charset="-127"/>
+                <a:ea typeface="D2Coding" panose="020B0609020101020101" pitchFamily="49" charset="-127"/>
+              </a:rPr>
+              <a:t> (스트리밍):</a:t>
+            </a:r>
+          </a:p>
+          <a:p>
+            <a:pPr marL="742950" lvl="1" indent="-285750">
+              <a:buFont typeface="Wingdings" panose="05000000000000000000" pitchFamily="2" charset="2"/>
+              <a:buChar char="§"/>
+            </a:pPr>
+            <a:r>
+              <a:rPr lang="ko-KR" altLang="ko-KR" sz="1400" dirty="0">
+                <a:latin typeface="D2Coding" panose="020B0609020101020101" pitchFamily="49" charset="-127"/>
+                <a:ea typeface="D2Coding" panose="020B0609020101020101" pitchFamily="49" charset="-127"/>
+              </a:rPr>
+              <a:t>모델이 답변을 생성할 때 한 번에 완성된 텍스트를 보여주는 것이 아니라, 글자가 실시간으로 출력되게 만드는 기능</a:t>
+            </a:r>
+          </a:p>
+          <a:p>
+            <a:pPr marL="342900" lvl="0" indent="-342900">
+              <a:buFont typeface="Wingdings" panose="05000000000000000000" pitchFamily="2" charset="2"/>
+              <a:buChar char="§"/>
+            </a:pPr>
+            <a:endParaRPr lang="en-US" altLang="ko-KR" sz="1600" b="1" dirty="0">
+              <a:latin typeface="D2Coding" panose="020B0609020101020101" pitchFamily="49" charset="-127"/>
+              <a:ea typeface="D2Coding" panose="020B0609020101020101" pitchFamily="49" charset="-127"/>
+            </a:endParaRPr>
+          </a:p>
+          <a:p>
+            <a:pPr marL="342900" lvl="0" indent="-342900">
+              <a:buFont typeface="Wingdings" panose="05000000000000000000" pitchFamily="2" charset="2"/>
+              <a:buChar char="§"/>
+            </a:pPr>
+            <a:r>
+              <a:rPr lang="ko-KR" altLang="ko-KR" sz="1600" b="1" dirty="0" err="1">
+                <a:latin typeface="D2Coding" panose="020B0609020101020101" pitchFamily="49" charset="-127"/>
+                <a:ea typeface="D2Coding" panose="020B0609020101020101" pitchFamily="49" charset="-127"/>
+              </a:rPr>
+              <a:t>Structured</a:t>
+            </a:r>
+            <a:r>
+              <a:rPr lang="ko-KR" altLang="ko-KR" sz="1600" b="1" dirty="0">
+                <a:latin typeface="D2Coding" panose="020B0609020101020101" pitchFamily="49" charset="-127"/>
+                <a:ea typeface="D2Coding" panose="020B0609020101020101" pitchFamily="49" charset="-127"/>
+              </a:rPr>
+              <a:t> </a:t>
+            </a:r>
+            <a:r>
+              <a:rPr lang="ko-KR" altLang="ko-KR" sz="1600" b="1" dirty="0" err="1">
+                <a:latin typeface="D2Coding" panose="020B0609020101020101" pitchFamily="49" charset="-127"/>
+                <a:ea typeface="D2Coding" panose="020B0609020101020101" pitchFamily="49" charset="-127"/>
+              </a:rPr>
+              <a:t>output</a:t>
+            </a:r>
+            <a:r>
+              <a:rPr lang="ko-KR" altLang="ko-KR" sz="1600" b="1" dirty="0">
+                <a:latin typeface="D2Coding" panose="020B0609020101020101" pitchFamily="49" charset="-127"/>
+                <a:ea typeface="D2Coding" panose="020B0609020101020101" pitchFamily="49" charset="-127"/>
+              </a:rPr>
+              <a:t> (구조화된 출력):</a:t>
+            </a:r>
+          </a:p>
+          <a:p>
+            <a:pPr marL="742950" lvl="1" indent="-285750">
+              <a:buFont typeface="Wingdings" panose="05000000000000000000" pitchFamily="2" charset="2"/>
+              <a:buChar char="§"/>
+            </a:pPr>
+            <a:r>
+              <a:rPr lang="ko-KR" altLang="ko-KR" sz="1400" dirty="0">
+                <a:latin typeface="D2Coding" panose="020B0609020101020101" pitchFamily="49" charset="-127"/>
+                <a:ea typeface="D2Coding" panose="020B0609020101020101" pitchFamily="49" charset="-127"/>
+              </a:rPr>
+              <a:t>답변을 단순한 </a:t>
+            </a:r>
+            <a:r>
+              <a:rPr lang="ko-KR" altLang="en-US" sz="1400" dirty="0">
+                <a:latin typeface="D2Coding" panose="020B0609020101020101" pitchFamily="49" charset="-127"/>
+                <a:ea typeface="D2Coding" panose="020B0609020101020101" pitchFamily="49" charset="-127"/>
+              </a:rPr>
+              <a:t>텍스트</a:t>
+            </a:r>
+            <a:r>
+              <a:rPr lang="ko-KR" altLang="ko-KR" sz="1400" dirty="0">
+                <a:latin typeface="D2Coding" panose="020B0609020101020101" pitchFamily="49" charset="-127"/>
+                <a:ea typeface="D2Coding" panose="020B0609020101020101" pitchFamily="49" charset="-127"/>
+              </a:rPr>
+              <a:t> 형태가 아니라, 프로그램이 다루기 쉬운 JSON 객체나 </a:t>
+            </a:r>
+            <a:r>
+              <a:rPr lang="ko-KR" altLang="ko-KR" sz="1400" dirty="0" err="1">
+                <a:latin typeface="D2Coding" panose="020B0609020101020101" pitchFamily="49" charset="-127"/>
+                <a:ea typeface="D2Coding" panose="020B0609020101020101" pitchFamily="49" charset="-127"/>
+              </a:rPr>
+              <a:t>Pydantic</a:t>
+            </a:r>
+            <a:r>
+              <a:rPr lang="ko-KR" altLang="ko-KR" sz="1400" dirty="0">
+                <a:latin typeface="D2Coding" panose="020B0609020101020101" pitchFamily="49" charset="-127"/>
+                <a:ea typeface="D2Coding" panose="020B0609020101020101" pitchFamily="49" charset="-127"/>
+              </a:rPr>
+              <a:t> 모델 등 정형화된 형태로 받아오는 기능</a:t>
+            </a:r>
+          </a:p>
         </p:txBody>
       </p:sp>
     </p:spTree>
     <p:extLst>
       <p:ext uri="{BB962C8B-B14F-4D97-AF65-F5344CB8AC3E}">
-        <p14:creationId xmlns:p14="http://schemas.microsoft.com/office/powerpoint/2010/main" val="1844632220"/>
+        <p14:creationId xmlns:p14="http://schemas.microsoft.com/office/powerpoint/2010/main" val="2896010215"/>
       </p:ext>
     </p:extLst>
   </p:cSld>
@@ -6077,7 +6989,7 @@
         <p:cNvPr id="1" name="">
           <a:extLst>
             <a:ext uri="{FF2B5EF4-FFF2-40B4-BE49-F238E27FC236}">
-              <a16:creationId xmlns:a16="http://schemas.microsoft.com/office/drawing/2014/main" id="{3A26AC63-80D2-80FB-8CC0-814D61C053B9}"/>
+              <a16:creationId xmlns:a16="http://schemas.microsoft.com/office/drawing/2014/main" id="{9D9488B0-400C-E229-E258-5E8A74504421}"/>
             </a:ext>
           </a:extLst>
         </p:cNvPr>
@@ -6094,94 +7006,10 @@
       </p:grpSpPr>
       <p:sp>
         <p:nvSpPr>
-          <p:cNvPr id="2" name="제목 1">
-            <a:extLst>
-              <a:ext uri="{FF2B5EF4-FFF2-40B4-BE49-F238E27FC236}">
-                <a16:creationId xmlns:a16="http://schemas.microsoft.com/office/drawing/2014/main" id="{EBA3E4AB-C965-FD93-800F-83BC62810B36}"/>
-              </a:ext>
-            </a:extLst>
-          </p:cNvPr>
-          <p:cNvSpPr>
-            <a:spLocks noGrp="1"/>
-          </p:cNvSpPr>
-          <p:nvPr>
-            <p:ph type="ctrTitle"/>
-          </p:nvPr>
-        </p:nvSpPr>
-        <p:spPr>
-          <a:xfrm>
-            <a:off x="838199" y="1164324"/>
-            <a:ext cx="10934701" cy="2387600"/>
-          </a:xfrm>
-        </p:spPr>
-        <p:txBody>
-          <a:bodyPr rtlCol="0" anchor="ctr" anchorCtr="0">
-            <a:normAutofit/>
-          </a:bodyPr>
-          <a:lstStyle/>
-          <a:p>
-            <a:r>
-              <a:rPr lang="en-US" altLang="ko-KR" sz="4400" dirty="0" err="1">
-                <a:solidFill>
-                  <a:schemeClr val="bg1"/>
-                </a:solidFill>
-                <a:latin typeface="D2Coding" panose="020B0609020101020101" pitchFamily="49" charset="-127"/>
-                <a:ea typeface="D2Coding" panose="020B0609020101020101" pitchFamily="49" charset="-127"/>
-              </a:rPr>
-              <a:t>Streamlit</a:t>
-            </a:r>
-            <a:endParaRPr lang="ko-KR" altLang="en-US" sz="4400" dirty="0">
-              <a:solidFill>
-                <a:schemeClr val="bg1"/>
-              </a:solidFill>
-              <a:latin typeface="D2Coding" panose="020B0609020101020101" pitchFamily="49" charset="-127"/>
-              <a:ea typeface="D2Coding" panose="020B0609020101020101" pitchFamily="49" charset="-127"/>
-            </a:endParaRPr>
-          </a:p>
-        </p:txBody>
-      </p:sp>
-    </p:spTree>
-    <p:extLst>
-      <p:ext uri="{BB962C8B-B14F-4D97-AF65-F5344CB8AC3E}">
-        <p14:creationId xmlns:p14="http://schemas.microsoft.com/office/powerpoint/2010/main" val="1550098391"/>
-      </p:ext>
-    </p:extLst>
-  </p:cSld>
-  <p:clrMapOvr>
-    <a:masterClrMapping/>
-  </p:clrMapOvr>
-</p:sld>
-</file>
-
-<file path=ppt/slides/slide19.xml><?xml version="1.0" encoding="utf-8"?>
-<p:sld xmlns:a="http://schemas.openxmlformats.org/drawingml/2006/main" xmlns:r="http://schemas.openxmlformats.org/officeDocument/2006/relationships" xmlns:p="http://schemas.openxmlformats.org/presentationml/2006/main">
-  <p:cSld>
-    <p:spTree>
-      <p:nvGrpSpPr>
-        <p:cNvPr id="1" name="">
-          <a:extLst>
-            <a:ext uri="{FF2B5EF4-FFF2-40B4-BE49-F238E27FC236}">
-              <a16:creationId xmlns:a16="http://schemas.microsoft.com/office/drawing/2014/main" id="{01B61A5D-45D1-76DA-1582-BFFDE0959AF0}"/>
-            </a:ext>
-          </a:extLst>
-        </p:cNvPr>
-        <p:cNvGrpSpPr/>
-        <p:nvPr/>
-      </p:nvGrpSpPr>
-      <p:grpSpPr>
-        <a:xfrm>
-          <a:off x="0" y="0"/>
-          <a:ext cx="0" cy="0"/>
-          <a:chOff x="0" y="0"/>
-          <a:chExt cx="0" cy="0"/>
-        </a:xfrm>
-      </p:grpSpPr>
-      <p:sp>
-        <p:nvSpPr>
           <p:cNvPr id="3" name="제목 1">
             <a:extLst>
               <a:ext uri="{FF2B5EF4-FFF2-40B4-BE49-F238E27FC236}">
-                <a16:creationId xmlns:a16="http://schemas.microsoft.com/office/drawing/2014/main" id="{26305A66-687B-0880-E4A0-AA5A9279669E}"/>
+                <a16:creationId xmlns:a16="http://schemas.microsoft.com/office/drawing/2014/main" id="{93BC72C1-8F8B-BCD1-1512-760B19BD2F60}"/>
               </a:ext>
             </a:extLst>
           </p:cNvPr>
@@ -6236,7 +7064,7 @@
           <p:cNvPr id="2" name="제목 1">
             <a:extLst>
               <a:ext uri="{FF2B5EF4-FFF2-40B4-BE49-F238E27FC236}">
-                <a16:creationId xmlns:a16="http://schemas.microsoft.com/office/drawing/2014/main" id="{A30CF0C3-82F6-EBEB-B6A0-D1260D2BADA2}"/>
+                <a16:creationId xmlns:a16="http://schemas.microsoft.com/office/drawing/2014/main" id="{CC076143-D16D-C638-5908-95C3A9097020}"/>
               </a:ext>
             </a:extLst>
           </p:cNvPr>
@@ -6285,14 +7113,14 @@
                 <a:latin typeface="D2Coding" panose="020B0609020101020101" pitchFamily="49" charset="-127"/>
                 <a:ea typeface="D2Coding" panose="020B0609020101020101" pitchFamily="49" charset="-127"/>
               </a:rPr>
-              <a:t>Dive into </a:t>
+              <a:t>Dive into LLM Fundamentals with </a:t>
             </a:r>
             <a:r>
               <a:rPr lang="en-US" altLang="ko-KR" sz="2800" cap="none" dirty="0" err="1">
                 <a:latin typeface="D2Coding" panose="020B0609020101020101" pitchFamily="49" charset="-127"/>
                 <a:ea typeface="D2Coding" panose="020B0609020101020101" pitchFamily="49" charset="-127"/>
               </a:rPr>
-              <a:t>Streamlit</a:t>
+              <a:t>LangChain</a:t>
             </a:r>
             <a:endParaRPr lang="en-US" altLang="ko-KR" sz="2800" cap="none" dirty="0">
               <a:latin typeface="D2Coding" panose="020B0609020101020101" pitchFamily="49" charset="-127"/>
@@ -6306,7 +7134,7 @@
           <p:cNvPr id="5" name="슬라이드 번호 개체 틀 3">
             <a:extLst>
               <a:ext uri="{FF2B5EF4-FFF2-40B4-BE49-F238E27FC236}">
-                <a16:creationId xmlns:a16="http://schemas.microsoft.com/office/drawing/2014/main" id="{CC1A80A2-C271-7EC7-37D2-345111662E81}"/>
+                <a16:creationId xmlns:a16="http://schemas.microsoft.com/office/drawing/2014/main" id="{D59735E0-7504-7A8D-EF92-EEB2DEFE25DA}"/>
               </a:ext>
             </a:extLst>
           </p:cNvPr>
@@ -6334,7 +7162,7 @@
                 <a:cs typeface="Times New Roman" panose="02020603050405020304" pitchFamily="18" charset="0"/>
               </a:rPr>
               <a:pPr/>
-              <a:t>19</a:t>
+              <a:t>18</a:t>
             </a:fld>
             <a:endParaRPr lang="en-US" sz="1400" b="1" dirty="0">
               <a:latin typeface="Times New Roman" panose="02020603050405020304" pitchFamily="18" charset="0"/>
@@ -6346,10 +7174,10 @@
       </p:sp>
       <p:pic>
         <p:nvPicPr>
-          <p:cNvPr id="15" name="그림 14">
+          <p:cNvPr id="12" name="그림 11">
             <a:extLst>
               <a:ext uri="{FF2B5EF4-FFF2-40B4-BE49-F238E27FC236}">
-                <a16:creationId xmlns:a16="http://schemas.microsoft.com/office/drawing/2014/main" id="{44FF98F8-BFC2-6F3D-B8B1-5AF358FEF0CD}"/>
+                <a16:creationId xmlns:a16="http://schemas.microsoft.com/office/drawing/2014/main" id="{D8A98425-E80D-E2E4-D1C5-23D4BFA3078E}"/>
               </a:ext>
             </a:extLst>
           </p:cNvPr>
@@ -6366,18 +7194,167 @@
         </p:blipFill>
         <p:spPr>
           <a:xfrm>
-            <a:off x="2880364" y="1842839"/>
-            <a:ext cx="5544324" cy="3553321"/>
+            <a:off x="1819275" y="1823523"/>
+            <a:ext cx="8010085" cy="4552494"/>
           </a:xfrm>
           <a:prstGeom prst="rect">
             <a:avLst/>
           </a:prstGeom>
         </p:spPr>
       </p:pic>
+      <p:sp>
+        <p:nvSpPr>
+          <p:cNvPr id="6" name="TextBox 5">
+            <a:extLst>
+              <a:ext uri="{FF2B5EF4-FFF2-40B4-BE49-F238E27FC236}">
+                <a16:creationId xmlns:a16="http://schemas.microsoft.com/office/drawing/2014/main" id="{D5A0F647-5DCC-9369-B195-3DBD957974A3}"/>
+              </a:ext>
+            </a:extLst>
+          </p:cNvPr>
+          <p:cNvSpPr txBox="1"/>
+          <p:nvPr/>
+        </p:nvSpPr>
+        <p:spPr>
+          <a:xfrm>
+            <a:off x="625201" y="1351306"/>
+            <a:ext cx="8077200" cy="338554"/>
+          </a:xfrm>
+          <a:prstGeom prst="rect">
+            <a:avLst/>
+          </a:prstGeom>
+          <a:noFill/>
+        </p:spPr>
+        <p:txBody>
+          <a:bodyPr wrap="square">
+            <a:spAutoFit/>
+          </a:bodyPr>
+          <a:lstStyle/>
+          <a:p>
+            <a:r>
+              <a:rPr lang="en-US" altLang="ko-KR" sz="1600" dirty="0">
+                <a:latin typeface="D2Coding" panose="020B0609020101020101" pitchFamily="49" charset="-127"/>
+                <a:ea typeface="D2Coding" panose="020B0609020101020101" pitchFamily="49" charset="-127"/>
+              </a:rPr>
+              <a:t>Click</a:t>
+            </a:r>
+            <a:r>
+              <a:rPr lang="ko-KR" altLang="en-US" sz="1600" dirty="0">
+                <a:latin typeface="D2Coding" panose="020B0609020101020101" pitchFamily="49" charset="-127"/>
+                <a:ea typeface="D2Coding" panose="020B0609020101020101" pitchFamily="49" charset="-127"/>
+              </a:rPr>
+              <a:t> </a:t>
+            </a:r>
+            <a:r>
+              <a:rPr lang="en-US" altLang="ko-KR" sz="1600" dirty="0">
+                <a:latin typeface="D2Coding" panose="020B0609020101020101" pitchFamily="49" charset="-127"/>
+                <a:ea typeface="D2Coding" panose="020B0609020101020101" pitchFamily="49" charset="-127"/>
+                <a:hlinkClick r:id="rId3"/>
+              </a:rPr>
+              <a:t>CH1_LLM_Fundamentals with </a:t>
+            </a:r>
+            <a:r>
+              <a:rPr lang="en-US" altLang="ko-KR" sz="1600" dirty="0" err="1">
+                <a:latin typeface="D2Coding" panose="020B0609020101020101" pitchFamily="49" charset="-127"/>
+                <a:ea typeface="D2Coding" panose="020B0609020101020101" pitchFamily="49" charset="-127"/>
+                <a:hlinkClick r:id="rId3"/>
+              </a:rPr>
+              <a:t>LangChain.ipynb</a:t>
+            </a:r>
+            <a:endParaRPr lang="ko-KR" altLang="en-US" sz="1600" dirty="0">
+              <a:latin typeface="D2Coding" panose="020B0609020101020101" pitchFamily="49" charset="-127"/>
+              <a:ea typeface="D2Coding" panose="020B0609020101020101" pitchFamily="49" charset="-127"/>
+            </a:endParaRPr>
+          </a:p>
+        </p:txBody>
+      </p:sp>
     </p:spTree>
     <p:extLst>
       <p:ext uri="{BB962C8B-B14F-4D97-AF65-F5344CB8AC3E}">
-        <p14:creationId xmlns:p14="http://schemas.microsoft.com/office/powerpoint/2010/main" val="3768099158"/>
+        <p14:creationId xmlns:p14="http://schemas.microsoft.com/office/powerpoint/2010/main" val="1844632220"/>
+      </p:ext>
+    </p:extLst>
+  </p:cSld>
+  <p:clrMapOvr>
+    <a:masterClrMapping/>
+  </p:clrMapOvr>
+</p:sld>
+</file>
+
+<file path=ppt/slides/slide19.xml><?xml version="1.0" encoding="utf-8"?>
+<p:sld xmlns:a="http://schemas.openxmlformats.org/drawingml/2006/main" xmlns:r="http://schemas.openxmlformats.org/officeDocument/2006/relationships" xmlns:p="http://schemas.openxmlformats.org/presentationml/2006/main">
+  <p:cSld>
+    <p:spTree>
+      <p:nvGrpSpPr>
+        <p:cNvPr id="1" name="">
+          <a:extLst>
+            <a:ext uri="{FF2B5EF4-FFF2-40B4-BE49-F238E27FC236}">
+              <a16:creationId xmlns:a16="http://schemas.microsoft.com/office/drawing/2014/main" id="{3A26AC63-80D2-80FB-8CC0-814D61C053B9}"/>
+            </a:ext>
+          </a:extLst>
+        </p:cNvPr>
+        <p:cNvGrpSpPr/>
+        <p:nvPr/>
+      </p:nvGrpSpPr>
+      <p:grpSpPr>
+        <a:xfrm>
+          <a:off x="0" y="0"/>
+          <a:ext cx="0" cy="0"/>
+          <a:chOff x="0" y="0"/>
+          <a:chExt cx="0" cy="0"/>
+        </a:xfrm>
+      </p:grpSpPr>
+      <p:sp>
+        <p:nvSpPr>
+          <p:cNvPr id="2" name="제목 1">
+            <a:extLst>
+              <a:ext uri="{FF2B5EF4-FFF2-40B4-BE49-F238E27FC236}">
+                <a16:creationId xmlns:a16="http://schemas.microsoft.com/office/drawing/2014/main" id="{EBA3E4AB-C965-FD93-800F-83BC62810B36}"/>
+              </a:ext>
+            </a:extLst>
+          </p:cNvPr>
+          <p:cNvSpPr>
+            <a:spLocks noGrp="1"/>
+          </p:cNvSpPr>
+          <p:nvPr>
+            <p:ph type="ctrTitle"/>
+          </p:nvPr>
+        </p:nvSpPr>
+        <p:spPr>
+          <a:xfrm>
+            <a:off x="838199" y="1164324"/>
+            <a:ext cx="10934701" cy="2387600"/>
+          </a:xfrm>
+        </p:spPr>
+        <p:txBody>
+          <a:bodyPr rtlCol="0" anchor="ctr" anchorCtr="0">
+            <a:normAutofit/>
+          </a:bodyPr>
+          <a:lstStyle/>
+          <a:p>
+            <a:r>
+              <a:rPr lang="en-US" altLang="ko-KR" sz="4400" dirty="0" err="1">
+                <a:solidFill>
+                  <a:schemeClr val="bg1"/>
+                </a:solidFill>
+                <a:latin typeface="D2Coding" panose="020B0609020101020101" pitchFamily="49" charset="-127"/>
+                <a:ea typeface="D2Coding" panose="020B0609020101020101" pitchFamily="49" charset="-127"/>
+              </a:rPr>
+              <a:t>Streamlit</a:t>
+            </a:r>
+            <a:endParaRPr lang="ko-KR" altLang="en-US" sz="4400" dirty="0">
+              <a:solidFill>
+                <a:schemeClr val="bg1"/>
+              </a:solidFill>
+              <a:latin typeface="D2Coding" panose="020B0609020101020101" pitchFamily="49" charset="-127"/>
+              <a:ea typeface="D2Coding" panose="020B0609020101020101" pitchFamily="49" charset="-127"/>
+            </a:endParaRPr>
+          </a:p>
+        </p:txBody>
+      </p:sp>
+    </p:spTree>
+    <p:extLst>
+      <p:ext uri="{BB962C8B-B14F-4D97-AF65-F5344CB8AC3E}">
+        <p14:creationId xmlns:p14="http://schemas.microsoft.com/office/powerpoint/2010/main" val="1550098391"/>
       </p:ext>
     </p:extLst>
   </p:cSld>
@@ -6754,7 +7731,7 @@
         <p:cNvPr id="1" name="">
           <a:extLst>
             <a:ext uri="{FF2B5EF4-FFF2-40B4-BE49-F238E27FC236}">
-              <a16:creationId xmlns:a16="http://schemas.microsoft.com/office/drawing/2014/main" id="{70B4B695-C5A6-9AAF-EC0E-1B82FAA39A3F}"/>
+              <a16:creationId xmlns:a16="http://schemas.microsoft.com/office/drawing/2014/main" id="{01B61A5D-45D1-76DA-1582-BFFDE0959AF0}"/>
             </a:ext>
           </a:extLst>
         </p:cNvPr>
@@ -6774,7 +7751,7 @@
           <p:cNvPr id="3" name="제목 1">
             <a:extLst>
               <a:ext uri="{FF2B5EF4-FFF2-40B4-BE49-F238E27FC236}">
-                <a16:creationId xmlns:a16="http://schemas.microsoft.com/office/drawing/2014/main" id="{7050D754-89EF-10CC-3E80-B153678EBC73}"/>
+                <a16:creationId xmlns:a16="http://schemas.microsoft.com/office/drawing/2014/main" id="{26305A66-687B-0880-E4A0-AA5A9279669E}"/>
               </a:ext>
             </a:extLst>
           </p:cNvPr>
@@ -6829,7 +7806,7 @@
           <p:cNvPr id="2" name="제목 1">
             <a:extLst>
               <a:ext uri="{FF2B5EF4-FFF2-40B4-BE49-F238E27FC236}">
-                <a16:creationId xmlns:a16="http://schemas.microsoft.com/office/drawing/2014/main" id="{49B1E185-1C34-4880-DB3B-32881A72E16F}"/>
+                <a16:creationId xmlns:a16="http://schemas.microsoft.com/office/drawing/2014/main" id="{A30CF0C3-82F6-EBEB-B6A0-D1260D2BADA2}"/>
               </a:ext>
             </a:extLst>
           </p:cNvPr>
@@ -6899,6 +7876,240 @@
           <p:cNvPr id="5" name="슬라이드 번호 개체 틀 3">
             <a:extLst>
               <a:ext uri="{FF2B5EF4-FFF2-40B4-BE49-F238E27FC236}">
+                <a16:creationId xmlns:a16="http://schemas.microsoft.com/office/drawing/2014/main" id="{CC1A80A2-C271-7EC7-37D2-345111662E81}"/>
+              </a:ext>
+            </a:extLst>
+          </p:cNvPr>
+          <p:cNvSpPr>
+            <a:spLocks noGrp="1"/>
+          </p:cNvSpPr>
+          <p:nvPr>
+            <p:ph type="sldNum" sz="quarter" idx="12"/>
+          </p:nvPr>
+        </p:nvSpPr>
+        <p:spPr>
+          <a:xfrm>
+            <a:off x="11162487" y="299420"/>
+            <a:ext cx="753545" cy="365125"/>
+          </a:xfrm>
+        </p:spPr>
+        <p:txBody>
+          <a:bodyPr/>
+          <a:lstStyle/>
+          <a:p>
+            <a:fld id="{D57F1E4F-1CFF-5643-939E-217C01CDF565}" type="slidenum">
+              <a:rPr lang="en-US" sz="1400" b="1" smtClean="0">
+                <a:latin typeface="Times New Roman" panose="02020603050405020304" pitchFamily="18" charset="0"/>
+                <a:ea typeface="Verdana" panose="020B0604030504040204" pitchFamily="34" charset="0"/>
+                <a:cs typeface="Times New Roman" panose="02020603050405020304" pitchFamily="18" charset="0"/>
+              </a:rPr>
+              <a:pPr/>
+              <a:t>20</a:t>
+            </a:fld>
+            <a:endParaRPr lang="en-US" sz="1400" b="1" dirty="0">
+              <a:latin typeface="Times New Roman" panose="02020603050405020304" pitchFamily="18" charset="0"/>
+              <a:ea typeface="Verdana" panose="020B0604030504040204" pitchFamily="34" charset="0"/>
+              <a:cs typeface="Times New Roman" panose="02020603050405020304" pitchFamily="18" charset="0"/>
+            </a:endParaRPr>
+          </a:p>
+        </p:txBody>
+      </p:sp>
+      <p:pic>
+        <p:nvPicPr>
+          <p:cNvPr id="15" name="그림 14">
+            <a:extLst>
+              <a:ext uri="{FF2B5EF4-FFF2-40B4-BE49-F238E27FC236}">
+                <a16:creationId xmlns:a16="http://schemas.microsoft.com/office/drawing/2014/main" id="{44FF98F8-BFC2-6F3D-B8B1-5AF358FEF0CD}"/>
+              </a:ext>
+            </a:extLst>
+          </p:cNvPr>
+          <p:cNvPicPr>
+            <a:picLocks noChangeAspect="1"/>
+          </p:cNvPicPr>
+          <p:nvPr/>
+        </p:nvPicPr>
+        <p:blipFill>
+          <a:blip r:embed="rId2"/>
+          <a:stretch>
+            <a:fillRect/>
+          </a:stretch>
+        </p:blipFill>
+        <p:spPr>
+          <a:xfrm>
+            <a:off x="2880364" y="1842839"/>
+            <a:ext cx="5544324" cy="3553321"/>
+          </a:xfrm>
+          <a:prstGeom prst="rect">
+            <a:avLst/>
+          </a:prstGeom>
+        </p:spPr>
+      </p:pic>
+    </p:spTree>
+    <p:extLst>
+      <p:ext uri="{BB962C8B-B14F-4D97-AF65-F5344CB8AC3E}">
+        <p14:creationId xmlns:p14="http://schemas.microsoft.com/office/powerpoint/2010/main" val="3768099158"/>
+      </p:ext>
+    </p:extLst>
+  </p:cSld>
+  <p:clrMapOvr>
+    <a:masterClrMapping/>
+  </p:clrMapOvr>
+</p:sld>
+</file>
+
+<file path=ppt/slides/slide21.xml><?xml version="1.0" encoding="utf-8"?>
+<p:sld xmlns:a="http://schemas.openxmlformats.org/drawingml/2006/main" xmlns:r="http://schemas.openxmlformats.org/officeDocument/2006/relationships" xmlns:p="http://schemas.openxmlformats.org/presentationml/2006/main">
+  <p:cSld>
+    <p:spTree>
+      <p:nvGrpSpPr>
+        <p:cNvPr id="1" name="">
+          <a:extLst>
+            <a:ext uri="{FF2B5EF4-FFF2-40B4-BE49-F238E27FC236}">
+              <a16:creationId xmlns:a16="http://schemas.microsoft.com/office/drawing/2014/main" id="{70B4B695-C5A6-9AAF-EC0E-1B82FAA39A3F}"/>
+            </a:ext>
+          </a:extLst>
+        </p:cNvPr>
+        <p:cNvGrpSpPr/>
+        <p:nvPr/>
+      </p:nvGrpSpPr>
+      <p:grpSpPr>
+        <a:xfrm>
+          <a:off x="0" y="0"/>
+          <a:ext cx="0" cy="0"/>
+          <a:chOff x="0" y="0"/>
+          <a:chExt cx="0" cy="0"/>
+        </a:xfrm>
+      </p:grpSpPr>
+      <p:sp>
+        <p:nvSpPr>
+          <p:cNvPr id="3" name="제목 1">
+            <a:extLst>
+              <a:ext uri="{FF2B5EF4-FFF2-40B4-BE49-F238E27FC236}">
+                <a16:creationId xmlns:a16="http://schemas.microsoft.com/office/drawing/2014/main" id="{7050D754-89EF-10CC-3E80-B153678EBC73}"/>
+              </a:ext>
+            </a:extLst>
+          </p:cNvPr>
+          <p:cNvSpPr txBox="1">
+            <a:spLocks/>
+          </p:cNvSpPr>
+          <p:nvPr/>
+        </p:nvSpPr>
+        <p:spPr>
+          <a:xfrm>
+            <a:off x="475645" y="481983"/>
+            <a:ext cx="10353762" cy="766439"/>
+          </a:xfrm>
+          <a:prstGeom prst="rect">
+            <a:avLst/>
+          </a:prstGeom>
+        </p:spPr>
+        <p:txBody>
+          <a:bodyPr vert="horz" lIns="91440" tIns="45720" rIns="91440" bIns="45720" rtlCol="0" anchor="ctr">
+            <a:normAutofit/>
+          </a:bodyPr>
+          <a:lstStyle>
+            <a:lvl1pPr algn="ctr" defTabSz="914400" rtl="0" eaLnBrk="1" latinLnBrk="1" hangingPunct="1">
+              <a:lnSpc>
+                <a:spcPct val="90000"/>
+              </a:lnSpc>
+              <a:spcBef>
+                <a:spcPct val="0"/>
+              </a:spcBef>
+              <a:buNone/>
+              <a:defRPr sz="3200" kern="1200" cap="all" baseline="0">
+                <a:solidFill>
+                  <a:schemeClr val="tx1"/>
+                </a:solidFill>
+                <a:effectLst/>
+                <a:latin typeface="Batang" panose="02030600000101010101" pitchFamily="18" charset="-127"/>
+                <a:ea typeface="Batang" panose="02030600000101010101" pitchFamily="18" charset="-127"/>
+                <a:cs typeface="+mj-cs"/>
+              </a:defRPr>
+            </a:lvl1pPr>
+          </a:lstStyle>
+          <a:p>
+            <a:pPr algn="l"/>
+            <a:endParaRPr lang="en-US" altLang="ko-KR" sz="2800" b="1" cap="none" dirty="0">
+              <a:latin typeface="Lora" pitchFamily="2" charset="0"/>
+            </a:endParaRPr>
+          </a:p>
+        </p:txBody>
+      </p:sp>
+      <p:sp>
+        <p:nvSpPr>
+          <p:cNvPr id="2" name="제목 1">
+            <a:extLst>
+              <a:ext uri="{FF2B5EF4-FFF2-40B4-BE49-F238E27FC236}">
+                <a16:creationId xmlns:a16="http://schemas.microsoft.com/office/drawing/2014/main" id="{49B1E185-1C34-4880-DB3B-32881A72E16F}"/>
+              </a:ext>
+            </a:extLst>
+          </p:cNvPr>
+          <p:cNvSpPr txBox="1">
+            <a:spLocks/>
+          </p:cNvSpPr>
+          <p:nvPr/>
+        </p:nvSpPr>
+        <p:spPr>
+          <a:xfrm>
+            <a:off x="625201" y="481983"/>
+            <a:ext cx="10353762" cy="766439"/>
+          </a:xfrm>
+          <a:prstGeom prst="rect">
+            <a:avLst/>
+          </a:prstGeom>
+        </p:spPr>
+        <p:txBody>
+          <a:bodyPr vert="horz" lIns="91440" tIns="45720" rIns="91440" bIns="45720" rtlCol="0" anchor="ctr">
+            <a:normAutofit/>
+          </a:bodyPr>
+          <a:lstStyle>
+            <a:lvl1pPr algn="ctr" defTabSz="914400" rtl="0" eaLnBrk="1" latinLnBrk="1" hangingPunct="1">
+              <a:lnSpc>
+                <a:spcPct val="90000"/>
+              </a:lnSpc>
+              <a:spcBef>
+                <a:spcPct val="0"/>
+              </a:spcBef>
+              <a:buNone/>
+              <a:defRPr sz="3200" kern="1200" cap="all" baseline="0">
+                <a:solidFill>
+                  <a:schemeClr val="tx1"/>
+                </a:solidFill>
+                <a:effectLst/>
+                <a:latin typeface="Batang" panose="02030600000101010101" pitchFamily="18" charset="-127"/>
+                <a:ea typeface="Batang" panose="02030600000101010101" pitchFamily="18" charset="-127"/>
+                <a:cs typeface="+mj-cs"/>
+              </a:defRPr>
+            </a:lvl1pPr>
+          </a:lstStyle>
+          <a:p>
+            <a:pPr algn="l"/>
+            <a:r>
+              <a:rPr lang="en-US" altLang="ko-KR" sz="2800" cap="none" dirty="0">
+                <a:latin typeface="D2Coding" panose="020B0609020101020101" pitchFamily="49" charset="-127"/>
+                <a:ea typeface="D2Coding" panose="020B0609020101020101" pitchFamily="49" charset="-127"/>
+              </a:rPr>
+              <a:t>Dive into </a:t>
+            </a:r>
+            <a:r>
+              <a:rPr lang="en-US" altLang="ko-KR" sz="2800" cap="none" dirty="0" err="1">
+                <a:latin typeface="D2Coding" panose="020B0609020101020101" pitchFamily="49" charset="-127"/>
+                <a:ea typeface="D2Coding" panose="020B0609020101020101" pitchFamily="49" charset="-127"/>
+              </a:rPr>
+              <a:t>Streamlit</a:t>
+            </a:r>
+            <a:endParaRPr lang="en-US" altLang="ko-KR" sz="2800" cap="none" dirty="0">
+              <a:latin typeface="D2Coding" panose="020B0609020101020101" pitchFamily="49" charset="-127"/>
+              <a:ea typeface="D2Coding" panose="020B0609020101020101" pitchFamily="49" charset="-127"/>
+            </a:endParaRPr>
+          </a:p>
+        </p:txBody>
+      </p:sp>
+      <p:sp>
+        <p:nvSpPr>
+          <p:cNvPr id="5" name="슬라이드 번호 개체 틀 3">
+            <a:extLst>
+              <a:ext uri="{FF2B5EF4-FFF2-40B4-BE49-F238E27FC236}">
                 <a16:creationId xmlns:a16="http://schemas.microsoft.com/office/drawing/2014/main" id="{D073BAF8-6B9C-38E4-EDDE-D59E653DBEE1}"/>
               </a:ext>
             </a:extLst>
@@ -6927,7 +8138,7 @@
                 <a:cs typeface="Times New Roman" panose="02020603050405020304" pitchFamily="18" charset="0"/>
               </a:rPr>
               <a:pPr/>
-              <a:t>20</a:t>
+              <a:t>21</a:t>
             </a:fld>
             <a:endParaRPr lang="en-US" sz="1400" b="1" dirty="0">
               <a:latin typeface="Times New Roman" panose="02020603050405020304" pitchFamily="18" charset="0"/>
